--- a/kubernetes/11_2_security.pptx
+++ b/kubernetes/11_2_security.pptx
@@ -266,7 +266,7 @@
             <a:fld id="{47855BD9-AF71-426C-9B9B-B0E52B88852E}" type="slidenum">
               <a:rPr lang="de-DE" sz="1000" smtClean="0"/>
               <a:pPr algn="ctr"/>
-              <a:t>‹#›</a:t>
+              <a:t>‹Nr.›</a:t>
             </a:fld>
             <a:endParaRPr lang="de-DE" sz="1000" dirty="0"/>
           </a:p>
@@ -415,7 +415,7 @@
             <a:fld id="{7D8C2C35-2B8A-446E-BEC0-FD36716C29AC}" type="slidenum">
               <a:rPr lang="de-DE" smtClean="0"/>
               <a:pPr/>
-              <a:t>‹#›</a:t>
+              <a:t>‹Nr.›</a:t>
             </a:fld>
             <a:endParaRPr lang="de-DE" dirty="0"/>
           </a:p>
@@ -17212,7 +17212,7 @@
               <a:pPr marL="0" lvl="0" indent="0" algn="r">
                 <a:buNone/>
               </a:pPr>
-              <a:t>‹#›</a:t>
+              <a:t>‹Nr.›</a:t>
             </a:fld>
             <a:endParaRPr lang="en-US" sz="900" noProof="0" dirty="0"/>
           </a:p>
@@ -33344,7 +33344,7 @@
           <a:p>
             <a:r>
               <a:rPr lang="en-US" dirty="0"/>
-              <a:t>PID Limits (alpha/beta feature)</a:t>
+              <a:t>PID Limits (stable release with K8S version 1.20)</a:t>
             </a:r>
           </a:p>
         </p:txBody>
@@ -33495,102 +33495,6 @@
                 <a:cs typeface="Arial Unicode MS" pitchFamily="34" charset="-128"/>
               </a:rPr>
               <a:t>cgroup</a:t>
-            </a:r>
-            <a:endParaRPr kumimoji="0" lang="en-US" sz="1800" b="0" i="0" u="none" strike="noStrike" kern="0" cap="none" spc="0" normalizeH="0" baseline="0" noProof="0" dirty="0">
-              <a:ln>
-                <a:noFill/>
-              </a:ln>
-              <a:effectLst/>
-              <a:uLnTx/>
-              <a:uFillTx/>
-              <a:ea typeface="Arial Unicode MS" pitchFamily="34" charset="-128"/>
-              <a:cs typeface="Arial Unicode MS" pitchFamily="34" charset="-128"/>
-            </a:endParaRPr>
-          </a:p>
-        </p:txBody>
-      </p:sp>
-      <p:sp>
-        <p:nvSpPr>
-          <p:cNvPr id="10" name="Speech Bubble: Rectangle 9">
-            <a:extLst>
-              <a:ext uri="{FF2B5EF4-FFF2-40B4-BE49-F238E27FC236}">
-                <a16:creationId xmlns:a16="http://schemas.microsoft.com/office/drawing/2014/main" id="{114D9996-2013-4DF8-8716-345842977D3C}"/>
-              </a:ext>
-            </a:extLst>
-          </p:cNvPr>
-          <p:cNvSpPr/>
-          <p:nvPr/>
-        </p:nvSpPr>
-        <p:spPr bwMode="gray">
-          <a:xfrm>
-            <a:off x="6474860" y="3468395"/>
-            <a:ext cx="4030108" cy="1509823"/>
-          </a:xfrm>
-          <a:prstGeom prst="wedgeRectCallout">
-            <a:avLst>
-              <a:gd name="adj1" fmla="val -90976"/>
-              <a:gd name="adj2" fmla="val -69"/>
-            </a:avLst>
-          </a:prstGeom>
-          <a:ln>
-            <a:headEnd/>
-            <a:tailEnd/>
-          </a:ln>
-        </p:spPr>
-        <p:style>
-          <a:lnRef idx="2">
-            <a:schemeClr val="accent5"/>
-          </a:lnRef>
-          <a:fillRef idx="1">
-            <a:schemeClr val="lt1"/>
-          </a:fillRef>
-          <a:effectRef idx="0">
-            <a:schemeClr val="accent5"/>
-          </a:effectRef>
-          <a:fontRef idx="minor">
-            <a:schemeClr val="dk1"/>
-          </a:fontRef>
-        </p:style>
-        <p:txBody>
-          <a:bodyPr lIns="90000" tIns="72000" rIns="90000" bIns="72000" rtlCol="0" anchor="ctr"/>
-          <a:lstStyle/>
-          <a:p>
-            <a:pPr marR="0" algn="ctr" defTabSz="914400" eaLnBrk="1" fontAlgn="base" latinLnBrk="0" hangingPunct="1">
-              <a:lnSpc>
-                <a:spcPct val="100000"/>
-              </a:lnSpc>
-              <a:spcBef>
-                <a:spcPct val="50000"/>
-              </a:spcBef>
-              <a:spcAft>
-                <a:spcPct val="0"/>
-              </a:spcAft>
-              <a:buClr>
-                <a:srgbClr val="F0AB00"/>
-              </a:buClr>
-              <a:buSzPct val="80000"/>
-              <a:tabLst/>
-            </a:pPr>
-            <a:r>
-              <a:rPr lang="en-US" sz="1800" kern="0" dirty="0">
-                <a:ea typeface="Arial Unicode MS" pitchFamily="34" charset="-128"/>
-                <a:cs typeface="Arial Unicode MS" pitchFamily="34" charset="-128"/>
-              </a:rPr>
-              <a:t>Feature is implemented on </a:t>
-            </a:r>
-            <a:r>
-              <a:rPr lang="en-US" sz="1800" kern="0" dirty="0" err="1">
-                <a:ea typeface="Arial Unicode MS" pitchFamily="34" charset="-128"/>
-                <a:cs typeface="Arial Unicode MS" pitchFamily="34" charset="-128"/>
-              </a:rPr>
-              <a:t>kubelet</a:t>
-            </a:r>
-            <a:r>
-              <a:rPr lang="en-US" sz="1800" kern="0" dirty="0">
-                <a:ea typeface="Arial Unicode MS" pitchFamily="34" charset="-128"/>
-                <a:cs typeface="Arial Unicode MS" pitchFamily="34" charset="-128"/>
-              </a:rPr>
-              <a:t> level in alpha stage</a:t>
             </a:r>
             <a:endParaRPr kumimoji="0" lang="en-US" sz="1800" b="0" i="0" u="none" strike="noStrike" kern="0" cap="none" spc="0" normalizeH="0" baseline="0" noProof="0" dirty="0">
               <a:ln>

--- a/kubernetes/11_2_security.pptx
+++ b/kubernetes/11_2_security.pptx
@@ -266,7 +266,7 @@
             <a:fld id="{47855BD9-AF71-426C-9B9B-B0E52B88852E}" type="slidenum">
               <a:rPr lang="de-DE" sz="1000" smtClean="0"/>
               <a:pPr algn="ctr"/>
-              <a:t>‹Nr.›</a:t>
+              <a:t>‹#›</a:t>
             </a:fld>
             <a:endParaRPr lang="de-DE" sz="1000" dirty="0"/>
           </a:p>
@@ -415,7 +415,7 @@
             <a:fld id="{7D8C2C35-2B8A-446E-BEC0-FD36716C29AC}" type="slidenum">
               <a:rPr lang="de-DE" smtClean="0"/>
               <a:pPr/>
-              <a:t>‹Nr.›</a:t>
+              <a:t>‹#›</a:t>
             </a:fld>
             <a:endParaRPr lang="de-DE" dirty="0"/>
           </a:p>
@@ -706,7 +706,59 @@
               </a:rPr>
               <a:t> to a service account and the pods will be scheduled, if its definition matches the criteria of the policy</a:t>
             </a:r>
-            <a:endParaRPr lang="en-US" dirty="0"/>
+          </a:p>
+          <a:p>
+            <a:endParaRPr lang="en-US" sz="1400" b="0" i="0" kern="1200" dirty="0">
+              <a:solidFill>
+                <a:schemeClr val="tx1"/>
+              </a:solidFill>
+              <a:effectLst/>
+              <a:latin typeface="+mn-lt"/>
+              <a:ea typeface="+mn-ea"/>
+              <a:cs typeface="+mn-cs"/>
+            </a:endParaRPr>
+          </a:p>
+          <a:p>
+            <a:r>
+              <a:rPr lang="en-US" sz="1400" b="0" i="0" kern="1200" dirty="0">
+                <a:solidFill>
+                  <a:schemeClr val="tx1"/>
+                </a:solidFill>
+                <a:effectLst/>
+                <a:latin typeface="+mn-lt"/>
+                <a:ea typeface="+mn-ea"/>
+                <a:cs typeface="+mn-cs"/>
+              </a:rPr>
+              <a:t>Sounds complicated? This is why the existing concept of </a:t>
+            </a:r>
+            <a:r>
+              <a:rPr lang="en-US" sz="1400" b="0" i="0" kern="1200" dirty="0" err="1">
+                <a:solidFill>
+                  <a:schemeClr val="tx1"/>
+                </a:solidFill>
+                <a:effectLst/>
+                <a:latin typeface="+mn-lt"/>
+                <a:ea typeface="+mn-ea"/>
+                <a:cs typeface="+mn-cs"/>
+              </a:rPr>
+              <a:t>PodSecurityPolicies</a:t>
+            </a:r>
+            <a:r>
+              <a:rPr lang="en-US" sz="1400" b="0" i="0" kern="1200" dirty="0">
+                <a:solidFill>
+                  <a:schemeClr val="tx1"/>
+                </a:solidFill>
+                <a:effectLst/>
+                <a:latin typeface="+mn-lt"/>
+                <a:ea typeface="+mn-ea"/>
+                <a:cs typeface="+mn-cs"/>
+              </a:rPr>
+              <a:t> got deprecated with K8S 1.21. A successor is being worked on, an first alpha is planned to be released with K8S 1.22 (see </a:t>
+            </a:r>
+            <a:r>
+              <a:rPr lang="en-US" dirty="0"/>
+              <a:t>https://github.com/kubernetes/enhancements/issues/2579).</a:t>
+            </a:r>
           </a:p>
         </p:txBody>
       </p:sp>
@@ -4067,7 +4119,7 @@
           <a:p>
             <a:r>
               <a:rPr lang="en-US" dirty="0"/>
-              <a:t>Unfortunately the current implementation is only in alpha stage and implemented on </a:t>
+              <a:t>Unfortunately the current implementation is stable since the release of K8S version 1.20, but it is implemented on </a:t>
             </a:r>
             <a:r>
               <a:rPr lang="en-US" dirty="0" err="1"/>
@@ -17212,7 +17264,7 @@
               <a:pPr marL="0" lvl="0" indent="0" algn="r">
                 <a:buNone/>
               </a:pPr>
-              <a:t>‹Nr.›</a:t>
+              <a:t>‹#›</a:t>
             </a:fld>
             <a:endParaRPr lang="en-US" sz="900" noProof="0" dirty="0"/>
           </a:p>
@@ -20470,6 +20522,67 @@
           </a:prstGeom>
         </p:spPr>
       </p:pic>
+      <p:sp>
+        <p:nvSpPr>
+          <p:cNvPr id="3" name="Octagon 2">
+            <a:extLst>
+              <a:ext uri="{FF2B5EF4-FFF2-40B4-BE49-F238E27FC236}">
+                <a16:creationId xmlns:a16="http://schemas.microsoft.com/office/drawing/2014/main" id="{909EFD4F-4EF7-4A63-A8CE-1BAB4B007308}"/>
+              </a:ext>
+            </a:extLst>
+          </p:cNvPr>
+          <p:cNvSpPr/>
+          <p:nvPr/>
+        </p:nvSpPr>
+        <p:spPr bwMode="gray">
+          <a:xfrm>
+            <a:off x="846513" y="3543800"/>
+            <a:ext cx="2390448" cy="2390448"/>
+          </a:xfrm>
+          <a:prstGeom prst="octagon">
+            <a:avLst/>
+          </a:prstGeom>
+          <a:solidFill>
+            <a:srgbClr val="FF0000"/>
+          </a:solidFill>
+          <a:ln w="152400" algn="ctr">
+            <a:solidFill>
+              <a:schemeClr val="bg1"/>
+            </a:solidFill>
+            <a:miter lim="800000"/>
+            <a:headEnd/>
+            <a:tailEnd/>
+          </a:ln>
+        </p:spPr>
+        <p:txBody>
+          <a:bodyPr lIns="90000" tIns="72000" rIns="90000" bIns="72000" rtlCol="0" anchor="ctr"/>
+          <a:lstStyle/>
+          <a:p>
+            <a:pPr algn="ctr" defTabSz="914400" fontAlgn="base">
+              <a:spcBef>
+                <a:spcPct val="50000"/>
+              </a:spcBef>
+              <a:spcAft>
+                <a:spcPct val="0"/>
+              </a:spcAft>
+              <a:buClr>
+                <a:srgbClr val="F0AB00"/>
+              </a:buClr>
+              <a:buSzPct val="80000"/>
+            </a:pPr>
+            <a:r>
+              <a:rPr lang="en-US" sz="2000" b="1" kern="0" dirty="0">
+                <a:solidFill>
+                  <a:schemeClr val="bg1"/>
+                </a:solidFill>
+                <a:ea typeface="Arial Unicode MS" pitchFamily="34" charset="-128"/>
+                <a:cs typeface="Arial Unicode MS" pitchFamily="34" charset="-128"/>
+              </a:rPr>
+              <a:t>Deprecated in K8S 1.21 </a:t>
+            </a:r>
+          </a:p>
+        </p:txBody>
+      </p:sp>
     </p:spTree>
     <p:extLst>
       <p:ext uri="{BB962C8B-B14F-4D97-AF65-F5344CB8AC3E}">
@@ -20480,6 +20593,84 @@
   <p:clrMapOvr>
     <a:masterClrMapping/>
   </p:clrMapOvr>
+  <p:timing>
+    <p:tnLst>
+      <p:par>
+        <p:cTn id="1" dur="indefinite" restart="never" nodeType="tmRoot">
+          <p:childTnLst>
+            <p:seq concurrent="1" nextAc="seek">
+              <p:cTn id="2" dur="indefinite" nodeType="mainSeq">
+                <p:childTnLst>
+                  <p:par>
+                    <p:cTn id="3" fill="hold">
+                      <p:stCondLst>
+                        <p:cond delay="indefinite"/>
+                      </p:stCondLst>
+                      <p:childTnLst>
+                        <p:par>
+                          <p:cTn id="4" fill="hold">
+                            <p:stCondLst>
+                              <p:cond delay="0"/>
+                            </p:stCondLst>
+                            <p:childTnLst>
+                              <p:par>
+                                <p:cTn id="5" presetID="1" presetClass="entr" presetSubtype="0" fill="hold" grpId="0" nodeType="clickEffect">
+                                  <p:stCondLst>
+                                    <p:cond delay="0"/>
+                                  </p:stCondLst>
+                                  <p:childTnLst>
+                                    <p:set>
+                                      <p:cBhvr>
+                                        <p:cTn id="6" dur="1" fill="hold">
+                                          <p:stCondLst>
+                                            <p:cond delay="0"/>
+                                          </p:stCondLst>
+                                        </p:cTn>
+                                        <p:tgtEl>
+                                          <p:spTgt spid="3"/>
+                                        </p:tgtEl>
+                                        <p:attrNameLst>
+                                          <p:attrName>style.visibility</p:attrName>
+                                        </p:attrNameLst>
+                                      </p:cBhvr>
+                                      <p:to>
+                                        <p:strVal val="visible"/>
+                                      </p:to>
+                                    </p:set>
+                                  </p:childTnLst>
+                                </p:cTn>
+                              </p:par>
+                            </p:childTnLst>
+                          </p:cTn>
+                        </p:par>
+                      </p:childTnLst>
+                    </p:cTn>
+                  </p:par>
+                </p:childTnLst>
+              </p:cTn>
+              <p:prevCondLst>
+                <p:cond evt="onPrev" delay="0">
+                  <p:tgtEl>
+                    <p:sldTgt/>
+                  </p:tgtEl>
+                </p:cond>
+              </p:prevCondLst>
+              <p:nextCondLst>
+                <p:cond evt="onNext" delay="0">
+                  <p:tgtEl>
+                    <p:sldTgt/>
+                  </p:tgtEl>
+                </p:cond>
+              </p:nextCondLst>
+            </p:seq>
+          </p:childTnLst>
+        </p:cTn>
+      </p:par>
+    </p:tnLst>
+    <p:bldLst>
+      <p:bldP spid="3" grpId="0" animBg="1"/>
+    </p:bldLst>
+  </p:timing>
 </p:sld>
 </file>
 
@@ -33344,7 +33535,7 @@
           <a:p>
             <a:r>
               <a:rPr lang="en-US" dirty="0"/>
-              <a:t>PID Limits (stable release with K8S version 1.20)</a:t>
+              <a:t>PID Limits</a:t>
             </a:r>
           </a:p>
         </p:txBody>
@@ -33497,6 +33688,112 @@
               <a:t>cgroup</a:t>
             </a:r>
             <a:endParaRPr kumimoji="0" lang="en-US" sz="1800" b="0" i="0" u="none" strike="noStrike" kern="0" cap="none" spc="0" normalizeH="0" baseline="0" noProof="0" dirty="0">
+              <a:ln>
+                <a:noFill/>
+              </a:ln>
+              <a:effectLst/>
+              <a:uLnTx/>
+              <a:uFillTx/>
+              <a:ea typeface="Arial Unicode MS" pitchFamily="34" charset="-128"/>
+              <a:cs typeface="Arial Unicode MS" pitchFamily="34" charset="-128"/>
+            </a:endParaRPr>
+          </a:p>
+        </p:txBody>
+      </p:sp>
+      <p:sp>
+        <p:nvSpPr>
+          <p:cNvPr id="3" name="Speech Bubble: Rectangle with Corners Rounded 2">
+            <a:extLst>
+              <a:ext uri="{FF2B5EF4-FFF2-40B4-BE49-F238E27FC236}">
+                <a16:creationId xmlns:a16="http://schemas.microsoft.com/office/drawing/2014/main" id="{A33CFCC6-346E-4658-BAF8-98D720B65F48}"/>
+              </a:ext>
+            </a:extLst>
+          </p:cNvPr>
+          <p:cNvSpPr/>
+          <p:nvPr/>
+        </p:nvSpPr>
+        <p:spPr bwMode="gray">
+          <a:xfrm>
+            <a:off x="6930189" y="3936733"/>
+            <a:ext cx="3574779" cy="1347536"/>
+          </a:xfrm>
+          <a:prstGeom prst="wedgeRoundRectCallout">
+            <a:avLst>
+              <a:gd name="adj1" fmla="val -6868"/>
+              <a:gd name="adj2" fmla="val -121071"/>
+              <a:gd name="adj3" fmla="val 16667"/>
+            </a:avLst>
+          </a:prstGeom>
+          <a:solidFill>
+            <a:schemeClr val="accent1"/>
+          </a:solidFill>
+          <a:ln w="6350" algn="ctr">
+            <a:noFill/>
+            <a:miter lim="800000"/>
+            <a:headEnd/>
+            <a:tailEnd/>
+          </a:ln>
+        </p:spPr>
+        <p:txBody>
+          <a:bodyPr lIns="90000" tIns="72000" rIns="90000" bIns="72000" rtlCol="0" anchor="ctr"/>
+          <a:lstStyle/>
+          <a:p>
+            <a:pPr marR="0" algn="ctr" defTabSz="914400" eaLnBrk="1" fontAlgn="base" latinLnBrk="0" hangingPunct="1">
+              <a:lnSpc>
+                <a:spcPct val="100000"/>
+              </a:lnSpc>
+              <a:spcBef>
+                <a:spcPct val="50000"/>
+              </a:spcBef>
+              <a:spcAft>
+                <a:spcPct val="0"/>
+              </a:spcAft>
+              <a:buClr>
+                <a:srgbClr val="F0AB00"/>
+              </a:buClr>
+              <a:buSzPct val="80000"/>
+              <a:tabLst/>
+            </a:pPr>
+            <a:r>
+              <a:rPr kumimoji="0" lang="en-US" sz="1800" b="0" i="0" u="none" strike="noStrike" kern="0" cap="none" spc="0" normalizeH="0" baseline="0" noProof="0" dirty="0">
+                <a:ln>
+                  <a:noFill/>
+                </a:ln>
+                <a:effectLst/>
+                <a:uLnTx/>
+                <a:uFillTx/>
+                <a:ea typeface="Arial Unicode MS" pitchFamily="34" charset="-128"/>
+                <a:cs typeface="Arial Unicode MS" pitchFamily="34" charset="-128"/>
+              </a:rPr>
+              <a:t>Can only be configured on </a:t>
+            </a:r>
+            <a:r>
+              <a:rPr kumimoji="0" lang="en-US" sz="1800" b="0" i="1" u="none" strike="noStrike" kern="0" cap="none" spc="0" normalizeH="0" baseline="0" noProof="0" dirty="0" err="1">
+                <a:ln>
+                  <a:noFill/>
+                </a:ln>
+                <a:effectLst/>
+                <a:uLnTx/>
+                <a:uFillTx/>
+                <a:ea typeface="Arial Unicode MS" pitchFamily="34" charset="-128"/>
+                <a:cs typeface="Arial Unicode MS" pitchFamily="34" charset="-128"/>
+              </a:rPr>
+              <a:t>kubelet</a:t>
+            </a:r>
+            <a:r>
+              <a:rPr kumimoji="0" lang="en-US" sz="1800" b="0" i="0" u="none" strike="noStrike" kern="0" cap="none" spc="0" normalizeH="0" baseline="0" noProof="0" dirty="0">
+                <a:ln>
+                  <a:noFill/>
+                </a:ln>
+                <a:effectLst/>
+                <a:uLnTx/>
+                <a:uFillTx/>
+                <a:ea typeface="Arial Unicode MS" pitchFamily="34" charset="-128"/>
+                <a:cs typeface="Arial Unicode MS" pitchFamily="34" charset="-128"/>
+              </a:rPr>
+              <a:t> level and thus by administrators</a:t>
+            </a:r>
+            <a:endParaRPr kumimoji="0" lang="en-DE" sz="1800" b="0" i="0" u="none" strike="noStrike" kern="0" cap="none" spc="0" normalizeH="0" baseline="0" noProof="0" dirty="0" err="1">
               <a:ln>
                 <a:noFill/>
               </a:ln>
@@ -34474,7 +34771,7 @@
                 <a:ea typeface="Arial Unicode MS" pitchFamily="34" charset="-128"/>
                 <a:cs typeface="Arial Unicode MS" pitchFamily="34" charset="-128"/>
               </a:rPr>
-              <a:t>Beta: Do not run as root user </a:t>
+              <a:t>Deprecated: Do not run as root user </a:t>
             </a:r>
           </a:p>
         </p:txBody>

--- a/kubernetes/11_2_security.pptx
+++ b/kubernetes/11_2_security.pptx
@@ -1619,8 +1619,13 @@
             </a:pPr>
             <a:r>
               <a:rPr lang="en-US" dirty="0"/>
-              <a:t>it’s implicitly a whitelisting</a:t>
-            </a:r>
+              <a:t>it’s implicitly </a:t>
+            </a:r>
+            <a:r>
+              <a:rPr lang="en-US"/>
+              <a:t>a allow-listing</a:t>
+            </a:r>
+            <a:endParaRPr lang="en-US" dirty="0"/>
           </a:p>
           <a:p>
             <a:pPr marL="645750" lvl="2" indent="-285750">
@@ -21285,7 +21290,7 @@
                 <a:ea typeface="Arial Unicode MS" pitchFamily="34" charset="-128"/>
                 <a:cs typeface="Arial Unicode MS" pitchFamily="34" charset="-128"/>
               </a:rPr>
-              <a:t>Whitelist volume types</a:t>
+              <a:t>List allowed volume types</a:t>
             </a:r>
           </a:p>
         </p:txBody>

--- a/kubernetes/11_2_security.pptx
+++ b/kubernetes/11_2_security.pptx
@@ -22,20 +22,20 @@
     <p:sldId id="950" r:id="rId10"/>
     <p:sldId id="951" r:id="rId11"/>
     <p:sldId id="952" r:id="rId12"/>
-    <p:sldId id="953" r:id="rId13"/>
-    <p:sldId id="954" r:id="rId14"/>
-    <p:sldId id="459" r:id="rId15"/>
-    <p:sldId id="926" r:id="rId16"/>
-    <p:sldId id="467" r:id="rId17"/>
-    <p:sldId id="931" r:id="rId18"/>
-    <p:sldId id="940" r:id="rId19"/>
-    <p:sldId id="936" r:id="rId20"/>
-    <p:sldId id="943" r:id="rId21"/>
-    <p:sldId id="942" r:id="rId22"/>
-    <p:sldId id="944" r:id="rId23"/>
-    <p:sldId id="945" r:id="rId24"/>
-    <p:sldId id="965" r:id="rId25"/>
-    <p:sldId id="967" r:id="rId26"/>
+    <p:sldId id="967" r:id="rId13"/>
+    <p:sldId id="953" r:id="rId14"/>
+    <p:sldId id="954" r:id="rId15"/>
+    <p:sldId id="459" r:id="rId16"/>
+    <p:sldId id="926" r:id="rId17"/>
+    <p:sldId id="467" r:id="rId18"/>
+    <p:sldId id="931" r:id="rId19"/>
+    <p:sldId id="940" r:id="rId20"/>
+    <p:sldId id="936" r:id="rId21"/>
+    <p:sldId id="943" r:id="rId22"/>
+    <p:sldId id="942" r:id="rId23"/>
+    <p:sldId id="944" r:id="rId24"/>
+    <p:sldId id="945" r:id="rId25"/>
+    <p:sldId id="965" r:id="rId26"/>
     <p:sldId id="458" r:id="rId27"/>
     <p:sldId id="265" r:id="rId28"/>
   </p:sldIdLst>
@@ -266,7 +266,7 @@
             <a:fld id="{47855BD9-AF71-426C-9B9B-B0E52B88852E}" type="slidenum">
               <a:rPr lang="de-DE" sz="1000" smtClean="0"/>
               <a:pPr algn="ctr"/>
-              <a:t>‹#›</a:t>
+              <a:t>‹Nr.›</a:t>
             </a:fld>
             <a:endParaRPr lang="de-DE" sz="1000" dirty="0"/>
           </a:p>
@@ -415,7 +415,7 @@
             <a:fld id="{7D8C2C35-2B8A-446E-BEC0-FD36716C29AC}" type="slidenum">
               <a:rPr lang="de-DE" smtClean="0"/>
               <a:pPr/>
-              <a:t>‹#›</a:t>
+              <a:t>‹Nr.›</a:t>
             </a:fld>
             <a:endParaRPr lang="de-DE" dirty="0"/>
           </a:p>
@@ -883,7 +883,7 @@
             <a:fld id="{7D8C2C35-2B8A-446E-BEC0-FD36716C29AC}" type="slidenum">
               <a:rPr lang="de-DE" smtClean="0"/>
               <a:pPr/>
-              <a:t>12</a:t>
+              <a:t>13</a:t>
             </a:fld>
             <a:endParaRPr lang="de-DE" dirty="0"/>
           </a:p>
@@ -1002,7 +1002,7 @@
             <a:fld id="{7D8C2C35-2B8A-446E-BEC0-FD36716C29AC}" type="slidenum">
               <a:rPr lang="de-DE" smtClean="0"/>
               <a:pPr/>
-              <a:t>13</a:t>
+              <a:t>14</a:t>
             </a:fld>
             <a:endParaRPr lang="de-DE" dirty="0"/>
           </a:p>
@@ -1126,7 +1126,7 @@
             <a:fld id="{7D8C2C35-2B8A-446E-BEC0-FD36716C29AC}" type="slidenum">
               <a:rPr lang="en-US" smtClean="0"/>
               <a:pPr/>
-              <a:t>14</a:t>
+              <a:t>15</a:t>
             </a:fld>
             <a:endParaRPr lang="en-US" dirty="0"/>
           </a:p>
@@ -1786,7 +1786,7 @@
             <a:fld id="{7D8C2C35-2B8A-446E-BEC0-FD36716C29AC}" type="slidenum">
               <a:rPr lang="de-DE" smtClean="0"/>
               <a:pPr/>
-              <a:t>16</a:t>
+              <a:t>17</a:t>
             </a:fld>
             <a:endParaRPr lang="de-DE" dirty="0"/>
           </a:p>
@@ -1921,7 +1921,7 @@
             <a:fld id="{7D8C2C35-2B8A-446E-BEC0-FD36716C29AC}" type="slidenum">
               <a:rPr lang="de-DE" smtClean="0"/>
               <a:pPr/>
-              <a:t>18</a:t>
+              <a:t>19</a:t>
             </a:fld>
             <a:endParaRPr lang="de-DE" dirty="0"/>
           </a:p>
@@ -2009,7 +2009,7 @@
             <a:fld id="{7D8C2C35-2B8A-446E-BEC0-FD36716C29AC}" type="slidenum">
               <a:rPr lang="de-DE" smtClean="0"/>
               <a:pPr/>
-              <a:t>19</a:t>
+              <a:t>20</a:t>
             </a:fld>
             <a:endParaRPr lang="de-DE" dirty="0"/>
           </a:p>
@@ -2155,7 +2155,7 @@
             <a:fld id="{7D8C2C35-2B8A-446E-BEC0-FD36716C29AC}" type="slidenum">
               <a:rPr lang="de-DE" smtClean="0"/>
               <a:pPr/>
-              <a:t>20</a:t>
+              <a:t>21</a:t>
             </a:fld>
             <a:endParaRPr lang="de-DE" dirty="0"/>
           </a:p>
@@ -2328,7 +2328,7 @@
             <a:fld id="{7D8C2C35-2B8A-446E-BEC0-FD36716C29AC}" type="slidenum">
               <a:rPr lang="de-DE" smtClean="0"/>
               <a:pPr/>
-              <a:t>21</a:t>
+              <a:t>22</a:t>
             </a:fld>
             <a:endParaRPr lang="de-DE" dirty="0"/>
           </a:p>
@@ -2447,7 +2447,7 @@
             <a:fld id="{7D8C2C35-2B8A-446E-BEC0-FD36716C29AC}" type="slidenum">
               <a:rPr lang="de-DE" smtClean="0"/>
               <a:pPr/>
-              <a:t>22</a:t>
+              <a:t>23</a:t>
             </a:fld>
             <a:endParaRPr lang="de-DE" dirty="0"/>
           </a:p>
@@ -2647,7 +2647,7 @@
             <a:fld id="{7D8C2C35-2B8A-446E-BEC0-FD36716C29AC}" type="slidenum">
               <a:rPr lang="de-DE" smtClean="0"/>
               <a:pPr/>
-              <a:t>23</a:t>
+              <a:t>24</a:t>
             </a:fld>
             <a:endParaRPr lang="de-DE" dirty="0"/>
           </a:p>
@@ -3366,7 +3366,7 @@
             <a:fld id="{7D8C2C35-2B8A-446E-BEC0-FD36716C29AC}" type="slidenum">
               <a:rPr lang="de-DE" smtClean="0"/>
               <a:pPr/>
-              <a:t>24</a:t>
+              <a:t>25</a:t>
             </a:fld>
             <a:endParaRPr lang="de-DE" dirty="0"/>
           </a:p>
@@ -17269,7 +17269,7 @@
               <a:pPr marL="0" lvl="0" indent="0" algn="r">
                 <a:buNone/>
               </a:pPr>
-              <a:t>‹#›</a:t>
+              <a:t>‹Nr.›</a:t>
             </a:fld>
             <a:endParaRPr lang="en-US" sz="900" noProof="0" dirty="0"/>
           </a:p>
@@ -20698,6 +20698,235 @@
       </p:grpSpPr>
       <p:sp>
         <p:nvSpPr>
+          <p:cNvPr id="4" name="Titel 3">
+            <a:extLst>
+              <a:ext uri="{FF2B5EF4-FFF2-40B4-BE49-F238E27FC236}">
+                <a16:creationId xmlns:a16="http://schemas.microsoft.com/office/drawing/2014/main" id="{A43FD3EE-D9BD-4F40-9DC6-4927E58B0855}"/>
+              </a:ext>
+            </a:extLst>
+          </p:cNvPr>
+          <p:cNvSpPr>
+            <a:spLocks noGrp="1"/>
+          </p:cNvSpPr>
+          <p:nvPr>
+            <p:ph type="title"/>
+          </p:nvPr>
+        </p:nvSpPr>
+        <p:spPr/>
+        <p:txBody>
+          <a:bodyPr/>
+          <a:lstStyle/>
+          <a:p>
+            <a:r>
+              <a:rPr lang="de-DE" dirty="0"/>
+              <a:t>The </a:t>
+            </a:r>
+            <a:r>
+              <a:rPr lang="de-DE" dirty="0" err="1"/>
+              <a:t>way</a:t>
+            </a:r>
+            <a:r>
+              <a:rPr lang="de-DE" dirty="0"/>
+              <a:t> </a:t>
+            </a:r>
+            <a:r>
+              <a:rPr lang="de-DE" dirty="0" err="1"/>
+              <a:t>forward</a:t>
+            </a:r>
+            <a:endParaRPr lang="de-DE" dirty="0"/>
+          </a:p>
+        </p:txBody>
+      </p:sp>
+      <p:sp>
+        <p:nvSpPr>
+          <p:cNvPr id="7" name="Textfeld 6">
+            <a:extLst>
+              <a:ext uri="{FF2B5EF4-FFF2-40B4-BE49-F238E27FC236}">
+                <a16:creationId xmlns:a16="http://schemas.microsoft.com/office/drawing/2014/main" id="{368936EA-2881-084A-B7F5-EB987DDD4906}"/>
+              </a:ext>
+            </a:extLst>
+          </p:cNvPr>
+          <p:cNvSpPr txBox="1"/>
+          <p:nvPr/>
+        </p:nvSpPr>
+        <p:spPr>
+          <a:xfrm>
+            <a:off x="504001" y="1338470"/>
+            <a:ext cx="9643666" cy="1938992"/>
+          </a:xfrm>
+          <a:prstGeom prst="rect">
+            <a:avLst/>
+          </a:prstGeom>
+          <a:noFill/>
+        </p:spPr>
+        <p:txBody>
+          <a:bodyPr wrap="none" lIns="0" tIns="0" rIns="0" bIns="0" rtlCol="0">
+            <a:spAutoFit/>
+          </a:bodyPr>
+          <a:lstStyle/>
+          <a:p>
+            <a:pPr fontAlgn="base">
+              <a:spcBef>
+                <a:spcPct val="50000"/>
+              </a:spcBef>
+              <a:spcAft>
+                <a:spcPct val="0"/>
+              </a:spcAft>
+              <a:buClr>
+                <a:srgbClr val="F0AB00"/>
+              </a:buClr>
+              <a:buSzPct val="80000"/>
+            </a:pPr>
+            <a:r>
+              <a:rPr lang="en-US" sz="1800" kern="0" dirty="0">
+                <a:ea typeface="Arial Unicode MS" pitchFamily="34" charset="-128"/>
+                <a:cs typeface="Arial Unicode MS" pitchFamily="34" charset="-128"/>
+              </a:rPr>
+              <a:t>Kubernetes enhancement </a:t>
+            </a:r>
+            <a:r>
+              <a:rPr lang="en-US" sz="1800" kern="0" dirty="0" err="1">
+                <a:ea typeface="Arial Unicode MS" pitchFamily="34" charset="-128"/>
+                <a:cs typeface="Arial Unicode MS" pitchFamily="34" charset="-128"/>
+              </a:rPr>
+              <a:t>proposa</a:t>
+            </a:r>
+            <a:r>
+              <a:rPr lang="en-US" sz="1800" kern="0" dirty="0">
+                <a:ea typeface="Arial Unicode MS" pitchFamily="34" charset="-128"/>
+                <a:cs typeface="Arial Unicode MS" pitchFamily="34" charset="-128"/>
+              </a:rPr>
+              <a:t> to replace pod security policies:</a:t>
+            </a:r>
+          </a:p>
+          <a:p>
+            <a:pPr fontAlgn="base">
+              <a:spcBef>
+                <a:spcPct val="50000"/>
+              </a:spcBef>
+              <a:spcAft>
+                <a:spcPct val="0"/>
+              </a:spcAft>
+              <a:buClr>
+                <a:srgbClr val="F0AB00"/>
+              </a:buClr>
+              <a:buSzPct val="80000"/>
+            </a:pPr>
+            <a:r>
+              <a:rPr lang="en-US" sz="1800" kern="0" dirty="0">
+                <a:ea typeface="Arial Unicode MS" pitchFamily="34" charset="-128"/>
+                <a:cs typeface="Arial Unicode MS" pitchFamily="34" charset="-128"/>
+                <a:hlinkClick r:id="rId2"/>
+              </a:rPr>
+              <a:t>https://github.com/kubernetes/enhancements/tree/master/keps/sig-auth/2579-psp-replacement</a:t>
+            </a:r>
+            <a:endParaRPr lang="en-US" sz="1800" kern="0" dirty="0">
+              <a:ea typeface="Arial Unicode MS" pitchFamily="34" charset="-128"/>
+              <a:cs typeface="Arial Unicode MS" pitchFamily="34" charset="-128"/>
+            </a:endParaRPr>
+          </a:p>
+          <a:p>
+            <a:pPr fontAlgn="base">
+              <a:spcBef>
+                <a:spcPct val="50000"/>
+              </a:spcBef>
+              <a:spcAft>
+                <a:spcPct val="0"/>
+              </a:spcAft>
+              <a:buClr>
+                <a:srgbClr val="F0AB00"/>
+              </a:buClr>
+              <a:buSzPct val="80000"/>
+            </a:pPr>
+            <a:endParaRPr lang="en-US" sz="1800" kern="0" dirty="0">
+              <a:ea typeface="Arial Unicode MS" pitchFamily="34" charset="-128"/>
+              <a:cs typeface="Arial Unicode MS" pitchFamily="34" charset="-128"/>
+            </a:endParaRPr>
+          </a:p>
+          <a:p>
+            <a:pPr fontAlgn="base">
+              <a:spcBef>
+                <a:spcPct val="50000"/>
+              </a:spcBef>
+              <a:spcAft>
+                <a:spcPct val="0"/>
+              </a:spcAft>
+              <a:buClr>
+                <a:srgbClr val="F0AB00"/>
+              </a:buClr>
+              <a:buSzPct val="80000"/>
+            </a:pPr>
+            <a:r>
+              <a:rPr lang="en-US" sz="1800" kern="0" dirty="0">
+                <a:ea typeface="Arial Unicode MS" pitchFamily="34" charset="-128"/>
+                <a:cs typeface="Arial Unicode MS" pitchFamily="34" charset="-128"/>
+              </a:rPr>
+              <a:t>Pod Security Standard Levels:</a:t>
+            </a:r>
+          </a:p>
+          <a:p>
+            <a:pPr fontAlgn="base">
+              <a:spcBef>
+                <a:spcPct val="50000"/>
+              </a:spcBef>
+              <a:spcAft>
+                <a:spcPct val="0"/>
+              </a:spcAft>
+              <a:buClr>
+                <a:srgbClr val="F0AB00"/>
+              </a:buClr>
+              <a:buSzPct val="80000"/>
+            </a:pPr>
+            <a:r>
+              <a:rPr lang="en-US" sz="1800" kern="0" dirty="0">
+                <a:ea typeface="Arial Unicode MS" pitchFamily="34" charset="-128"/>
+                <a:cs typeface="Arial Unicode MS" pitchFamily="34" charset="-128"/>
+                <a:hlinkClick r:id="rId3"/>
+              </a:rPr>
+              <a:t>https://kubernetes.io/docs/concepts/security/pod-security-standards/</a:t>
+            </a:r>
+            <a:r>
+              <a:rPr lang="en-US" sz="1800" kern="0" dirty="0">
+                <a:ea typeface="Arial Unicode MS" pitchFamily="34" charset="-128"/>
+                <a:cs typeface="Arial Unicode MS" pitchFamily="34" charset="-128"/>
+              </a:rPr>
+              <a:t>   </a:t>
+            </a:r>
+          </a:p>
+        </p:txBody>
+      </p:sp>
+    </p:spTree>
+    <p:extLst>
+      <p:ext uri="{BB962C8B-B14F-4D97-AF65-F5344CB8AC3E}">
+        <p14:creationId xmlns:p14="http://schemas.microsoft.com/office/powerpoint/2010/main" val="1491827402"/>
+      </p:ext>
+    </p:extLst>
+  </p:cSld>
+  <p:clrMapOvr>
+    <a:masterClrMapping/>
+  </p:clrMapOvr>
+</p:sld>
+</file>
+
+<file path=ppt/slides/slide13.xml><?xml version="1.0" encoding="utf-8"?>
+<p:sld xmlns:a="http://schemas.openxmlformats.org/drawingml/2006/main" xmlns:r="http://schemas.openxmlformats.org/officeDocument/2006/relationships" xmlns:p="http://schemas.openxmlformats.org/presentationml/2006/main">
+  <p:cSld>
+    <p:spTree>
+      <p:nvGrpSpPr>
+        <p:cNvPr id="1" name=""/>
+        <p:cNvGrpSpPr/>
+        <p:nvPr/>
+      </p:nvGrpSpPr>
+      <p:grpSpPr>
+        <a:xfrm>
+          <a:off x="0" y="0"/>
+          <a:ext cx="0" cy="0"/>
+          <a:chOff x="0" y="0"/>
+          <a:chExt cx="0" cy="0"/>
+        </a:xfrm>
+      </p:grpSpPr>
+      <p:sp>
+        <p:nvSpPr>
           <p:cNvPr id="4" name="Title 3">
             <a:extLst>
               <a:ext uri="{FF2B5EF4-FFF2-40B4-BE49-F238E27FC236}">
@@ -21011,7 +21240,7 @@
 </p:sld>
 </file>
 
-<file path=ppt/slides/slide13.xml><?xml version="1.0" encoding="utf-8"?>
+<file path=ppt/slides/slide14.xml><?xml version="1.0" encoding="utf-8"?>
 <p:sld xmlns:a="http://schemas.openxmlformats.org/drawingml/2006/main" xmlns:r="http://schemas.openxmlformats.org/officeDocument/2006/relationships" xmlns:p="http://schemas.openxmlformats.org/presentationml/2006/main">
   <p:cSld>
     <p:spTree>
@@ -21343,7 +21572,7 @@
 </p:sld>
 </file>
 
-<file path=ppt/slides/slide14.xml><?xml version="1.0" encoding="utf-8"?>
+<file path=ppt/slides/slide15.xml><?xml version="1.0" encoding="utf-8"?>
 <p:sld xmlns:a="http://schemas.openxmlformats.org/drawingml/2006/main" xmlns:r="http://schemas.openxmlformats.org/officeDocument/2006/relationships" xmlns:p="http://schemas.openxmlformats.org/presentationml/2006/main">
   <p:cSld>
     <p:spTree>
@@ -23043,7 +23272,7 @@
 </p:sld>
 </file>
 
-<file path=ppt/slides/slide15.xml><?xml version="1.0" encoding="utf-8"?>
+<file path=ppt/slides/slide16.xml><?xml version="1.0" encoding="utf-8"?>
 <p:sld xmlns:a="http://schemas.openxmlformats.org/drawingml/2006/main" xmlns:r="http://schemas.openxmlformats.org/officeDocument/2006/relationships" xmlns:p="http://schemas.openxmlformats.org/presentationml/2006/main">
   <p:cSld>
     <p:spTree>
@@ -23377,7 +23606,7 @@
 </p:sld>
 </file>
 
-<file path=ppt/slides/slide16.xml><?xml version="1.0" encoding="utf-8"?>
+<file path=ppt/slides/slide17.xml><?xml version="1.0" encoding="utf-8"?>
 <p:sld xmlns:a="http://schemas.openxmlformats.org/drawingml/2006/main" xmlns:r="http://schemas.openxmlformats.org/officeDocument/2006/relationships" xmlns:p="http://schemas.openxmlformats.org/presentationml/2006/main">
   <p:cSld>
     <p:spTree>
@@ -23465,7 +23694,7 @@
 </p:sld>
 </file>
 
-<file path=ppt/slides/slide17.xml><?xml version="1.0" encoding="utf-8"?>
+<file path=ppt/slides/slide18.xml><?xml version="1.0" encoding="utf-8"?>
 <p:sld xmlns:a="http://schemas.openxmlformats.org/drawingml/2006/main" xmlns:r="http://schemas.openxmlformats.org/officeDocument/2006/relationships" xmlns:p="http://schemas.openxmlformats.org/presentationml/2006/main">
   <p:cSld>
     <p:spTree>
@@ -23553,7 +23782,7 @@
 </p:sld>
 </file>
 
-<file path=ppt/slides/slide18.xml><?xml version="1.0" encoding="utf-8"?>
+<file path=ppt/slides/slide19.xml><?xml version="1.0" encoding="utf-8"?>
 <p:sld xmlns:a="http://schemas.openxmlformats.org/drawingml/2006/main" xmlns:r="http://schemas.openxmlformats.org/officeDocument/2006/relationships" xmlns:p="http://schemas.openxmlformats.org/presentationml/2006/main">
   <p:cSld>
     <p:spTree>
@@ -24292,801 +24521,6 @@
     <p:extLst>
       <p:ext uri="{BB962C8B-B14F-4D97-AF65-F5344CB8AC3E}">
         <p14:creationId xmlns:p14="http://schemas.microsoft.com/office/powerpoint/2010/main" val="2240798407"/>
-      </p:ext>
-    </p:extLst>
-  </p:cSld>
-  <p:clrMapOvr>
-    <a:masterClrMapping/>
-  </p:clrMapOvr>
-</p:sld>
-</file>
-
-<file path=ppt/slides/slide19.xml><?xml version="1.0" encoding="utf-8"?>
-<p:sld xmlns:a="http://schemas.openxmlformats.org/drawingml/2006/main" xmlns:r="http://schemas.openxmlformats.org/officeDocument/2006/relationships" xmlns:p="http://schemas.openxmlformats.org/presentationml/2006/main">
-  <p:cSld>
-    <p:spTree>
-      <p:nvGrpSpPr>
-        <p:cNvPr id="1" name=""/>
-        <p:cNvGrpSpPr/>
-        <p:nvPr/>
-      </p:nvGrpSpPr>
-      <p:grpSpPr>
-        <a:xfrm>
-          <a:off x="0" y="0"/>
-          <a:ext cx="0" cy="0"/>
-          <a:chOff x="0" y="0"/>
-          <a:chExt cx="0" cy="0"/>
-        </a:xfrm>
-      </p:grpSpPr>
-      <p:sp>
-        <p:nvSpPr>
-          <p:cNvPr id="39" name="Rectangle: Rounded Corners 38">
-            <a:extLst>
-              <a:ext uri="{FF2B5EF4-FFF2-40B4-BE49-F238E27FC236}">
-                <a16:creationId xmlns:a16="http://schemas.microsoft.com/office/drawing/2014/main" id="{6B05395E-1844-476D-AB95-17A4127B8AE6}"/>
-              </a:ext>
-            </a:extLst>
-          </p:cNvPr>
-          <p:cNvSpPr/>
-          <p:nvPr/>
-        </p:nvSpPr>
-        <p:spPr bwMode="gray">
-          <a:xfrm>
-            <a:off x="1269557" y="2926601"/>
-            <a:ext cx="4531162" cy="3484827"/>
-          </a:xfrm>
-          <a:prstGeom prst="roundRect">
-            <a:avLst/>
-          </a:prstGeom>
-          <a:solidFill>
-            <a:schemeClr val="tx2"/>
-          </a:solidFill>
-          <a:ln>
-            <a:headEnd/>
-            <a:tailEnd/>
-          </a:ln>
-        </p:spPr>
-        <p:style>
-          <a:lnRef idx="2">
-            <a:schemeClr val="accent2"/>
-          </a:lnRef>
-          <a:fillRef idx="1">
-            <a:schemeClr val="lt1"/>
-          </a:fillRef>
-          <a:effectRef idx="0">
-            <a:schemeClr val="accent2"/>
-          </a:effectRef>
-          <a:fontRef idx="minor">
-            <a:schemeClr val="dk1"/>
-          </a:fontRef>
-        </p:style>
-        <p:txBody>
-          <a:bodyPr lIns="90000" tIns="72000" rIns="90000" bIns="72000" rtlCol="0" anchor="b"/>
-          <a:lstStyle/>
-          <a:p>
-            <a:pPr marR="0" algn="ctr" defTabSz="914400" eaLnBrk="1" fontAlgn="base" latinLnBrk="0" hangingPunct="1">
-              <a:lnSpc>
-                <a:spcPct val="100000"/>
-              </a:lnSpc>
-              <a:spcBef>
-                <a:spcPct val="50000"/>
-              </a:spcBef>
-              <a:spcAft>
-                <a:spcPct val="0"/>
-              </a:spcAft>
-              <a:buClr>
-                <a:srgbClr val="F0AB00"/>
-              </a:buClr>
-              <a:buSzPct val="80000"/>
-              <a:tabLst/>
-            </a:pPr>
-            <a:r>
-              <a:rPr kumimoji="0" lang="en-US" sz="2000" b="1" i="0" u="none" strike="noStrike" kern="0" cap="none" spc="0" normalizeH="0" baseline="0" noProof="0" dirty="0">
-                <a:ln>
-                  <a:noFill/>
-                </a:ln>
-                <a:effectLst/>
-                <a:uLnTx/>
-                <a:uFillTx/>
-                <a:ea typeface="Arial Unicode MS" pitchFamily="34" charset="-128"/>
-                <a:cs typeface="Arial Unicode MS" pitchFamily="34" charset="-128"/>
-              </a:rPr>
-              <a:t>Host</a:t>
-            </a:r>
-            <a:endParaRPr kumimoji="0" lang="en-US" sz="1800" b="1" i="0" u="none" strike="noStrike" kern="0" cap="none" spc="0" normalizeH="0" baseline="0" noProof="0" dirty="0">
-              <a:ln>
-                <a:noFill/>
-              </a:ln>
-              <a:effectLst/>
-              <a:uLnTx/>
-              <a:uFillTx/>
-              <a:ea typeface="Arial Unicode MS" pitchFamily="34" charset="-128"/>
-              <a:cs typeface="Arial Unicode MS" pitchFamily="34" charset="-128"/>
-            </a:endParaRPr>
-          </a:p>
-        </p:txBody>
-      </p:sp>
-      <p:sp>
-        <p:nvSpPr>
-          <p:cNvPr id="40" name="Rectangle: Rounded Corners 39">
-            <a:extLst>
-              <a:ext uri="{FF2B5EF4-FFF2-40B4-BE49-F238E27FC236}">
-                <a16:creationId xmlns:a16="http://schemas.microsoft.com/office/drawing/2014/main" id="{01EB7DF5-45EB-4252-81B1-36C6C146EC09}"/>
-              </a:ext>
-            </a:extLst>
-          </p:cNvPr>
-          <p:cNvSpPr/>
-          <p:nvPr/>
-        </p:nvSpPr>
-        <p:spPr bwMode="gray">
-          <a:xfrm>
-            <a:off x="1269557" y="1008652"/>
-            <a:ext cx="4531162" cy="1743402"/>
-          </a:xfrm>
-          <a:prstGeom prst="roundRect">
-            <a:avLst/>
-          </a:prstGeom>
-          <a:ln>
-            <a:headEnd/>
-            <a:tailEnd/>
-          </a:ln>
-        </p:spPr>
-        <p:style>
-          <a:lnRef idx="2">
-            <a:schemeClr val="accent6"/>
-          </a:lnRef>
-          <a:fillRef idx="1">
-            <a:schemeClr val="lt1"/>
-          </a:fillRef>
-          <a:effectRef idx="0">
-            <a:schemeClr val="accent6"/>
-          </a:effectRef>
-          <a:fontRef idx="minor">
-            <a:schemeClr val="dk1"/>
-          </a:fontRef>
-        </p:style>
-        <p:txBody>
-          <a:bodyPr lIns="90000" tIns="72000" rIns="90000" bIns="72000" rtlCol="0" anchor="t"/>
-          <a:lstStyle/>
-          <a:p>
-            <a:pPr marR="0" algn="ctr" defTabSz="914400" eaLnBrk="1" fontAlgn="base" latinLnBrk="0" hangingPunct="1">
-              <a:lnSpc>
-                <a:spcPct val="100000"/>
-              </a:lnSpc>
-              <a:spcBef>
-                <a:spcPct val="50000"/>
-              </a:spcBef>
-              <a:spcAft>
-                <a:spcPct val="0"/>
-              </a:spcAft>
-              <a:buClr>
-                <a:srgbClr val="F0AB00"/>
-              </a:buClr>
-              <a:buSzPct val="80000"/>
-              <a:tabLst/>
-            </a:pPr>
-            <a:r>
-              <a:rPr kumimoji="0" lang="en-US" sz="2000" b="1" i="0" u="none" strike="noStrike" kern="0" cap="none" spc="0" normalizeH="0" baseline="0" noProof="0" dirty="0">
-                <a:ln>
-                  <a:noFill/>
-                </a:ln>
-                <a:effectLst/>
-                <a:uLnTx/>
-                <a:uFillTx/>
-                <a:ea typeface="Arial Unicode MS" pitchFamily="34" charset="-128"/>
-                <a:cs typeface="Arial Unicode MS" pitchFamily="34" charset="-128"/>
-              </a:rPr>
-              <a:t>K8s</a:t>
-            </a:r>
-            <a:endParaRPr kumimoji="0" lang="en-US" sz="1800" b="1" i="0" u="none" strike="noStrike" kern="0" cap="none" spc="0" normalizeH="0" baseline="0" noProof="0" dirty="0">
-              <a:ln>
-                <a:noFill/>
-              </a:ln>
-              <a:effectLst/>
-              <a:uLnTx/>
-              <a:uFillTx/>
-              <a:ea typeface="Arial Unicode MS" pitchFamily="34" charset="-128"/>
-              <a:cs typeface="Arial Unicode MS" pitchFamily="34" charset="-128"/>
-            </a:endParaRPr>
-          </a:p>
-        </p:txBody>
-      </p:sp>
-      <p:sp>
-        <p:nvSpPr>
-          <p:cNvPr id="41" name="Rectangle: Rounded Corners 40">
-            <a:extLst>
-              <a:ext uri="{FF2B5EF4-FFF2-40B4-BE49-F238E27FC236}">
-                <a16:creationId xmlns:a16="http://schemas.microsoft.com/office/drawing/2014/main" id="{84440113-9D89-45D0-8A5F-AB6580792D6B}"/>
-              </a:ext>
-            </a:extLst>
-          </p:cNvPr>
-          <p:cNvSpPr/>
-          <p:nvPr/>
-        </p:nvSpPr>
-        <p:spPr bwMode="gray">
-          <a:xfrm>
-            <a:off x="1642716" y="2402958"/>
-            <a:ext cx="3784845" cy="2172586"/>
-          </a:xfrm>
-          <a:prstGeom prst="roundRect">
-            <a:avLst/>
-          </a:prstGeom>
-          <a:ln>
-            <a:headEnd/>
-            <a:tailEnd/>
-          </a:ln>
-        </p:spPr>
-        <p:style>
-          <a:lnRef idx="2">
-            <a:schemeClr val="accent2"/>
-          </a:lnRef>
-          <a:fillRef idx="1">
-            <a:schemeClr val="lt1"/>
-          </a:fillRef>
-          <a:effectRef idx="0">
-            <a:schemeClr val="accent2"/>
-          </a:effectRef>
-          <a:fontRef idx="minor">
-            <a:schemeClr val="dk1"/>
-          </a:fontRef>
-        </p:style>
-        <p:txBody>
-          <a:bodyPr lIns="90000" tIns="72000" rIns="90000" bIns="72000" rtlCol="0" anchor="t"/>
-          <a:lstStyle/>
-          <a:p>
-            <a:pPr marR="0" algn="ctr" defTabSz="914400" eaLnBrk="1" fontAlgn="base" latinLnBrk="0" hangingPunct="1">
-              <a:lnSpc>
-                <a:spcPct val="100000"/>
-              </a:lnSpc>
-              <a:spcBef>
-                <a:spcPct val="50000"/>
-              </a:spcBef>
-              <a:spcAft>
-                <a:spcPct val="0"/>
-              </a:spcAft>
-              <a:buClr>
-                <a:srgbClr val="F0AB00"/>
-              </a:buClr>
-              <a:buSzPct val="80000"/>
-              <a:tabLst/>
-            </a:pPr>
-            <a:r>
-              <a:rPr kumimoji="0" lang="en-US" sz="2000" b="1" i="0" u="none" strike="noStrike" kern="0" cap="none" spc="0" normalizeH="0" baseline="0" noProof="0">
-                <a:ln>
-                  <a:noFill/>
-                </a:ln>
-                <a:effectLst/>
-                <a:uLnTx/>
-                <a:uFillTx/>
-                <a:ea typeface="Arial Unicode MS" pitchFamily="34" charset="-128"/>
-                <a:cs typeface="Arial Unicode MS" pitchFamily="34" charset="-128"/>
-              </a:rPr>
-              <a:t>Container</a:t>
-            </a:r>
-            <a:endParaRPr kumimoji="0" lang="en-US" sz="1800" b="1" i="0" u="none" strike="noStrike" kern="0" cap="none" spc="0" normalizeH="0" baseline="0" noProof="0" dirty="0">
-              <a:ln>
-                <a:noFill/>
-              </a:ln>
-              <a:effectLst/>
-              <a:uLnTx/>
-              <a:uFillTx/>
-              <a:ea typeface="Arial Unicode MS" pitchFamily="34" charset="-128"/>
-              <a:cs typeface="Arial Unicode MS" pitchFamily="34" charset="-128"/>
-            </a:endParaRPr>
-          </a:p>
-        </p:txBody>
-      </p:sp>
-      <p:cxnSp>
-        <p:nvCxnSpPr>
-          <p:cNvPr id="42" name="Straight Connector 41">
-            <a:extLst>
-              <a:ext uri="{FF2B5EF4-FFF2-40B4-BE49-F238E27FC236}">
-                <a16:creationId xmlns:a16="http://schemas.microsoft.com/office/drawing/2014/main" id="{0D4EDAE1-E022-4D47-BFE8-DB8E8A0CC4AB}"/>
-              </a:ext>
-            </a:extLst>
-          </p:cNvPr>
-          <p:cNvCxnSpPr>
-            <a:cxnSpLocks/>
-          </p:cNvCxnSpPr>
-          <p:nvPr/>
-        </p:nvCxnSpPr>
-        <p:spPr>
-          <a:xfrm>
-            <a:off x="3535138" y="4575544"/>
-            <a:ext cx="0" cy="485550"/>
-          </a:xfrm>
-          <a:prstGeom prst="line">
-            <a:avLst/>
-          </a:prstGeom>
-          <a:ln w="76200">
-            <a:solidFill>
-              <a:schemeClr val="bg2"/>
-            </a:solidFill>
-            <a:headEnd type="none" w="med" len="med"/>
-            <a:tailEnd type="none" w="med" len="med"/>
-          </a:ln>
-        </p:spPr>
-        <p:style>
-          <a:lnRef idx="1">
-            <a:schemeClr val="accent1"/>
-          </a:lnRef>
-          <a:fillRef idx="0">
-            <a:schemeClr val="accent1"/>
-          </a:fillRef>
-          <a:effectRef idx="0">
-            <a:schemeClr val="accent1"/>
-          </a:effectRef>
-          <a:fontRef idx="minor">
-            <a:schemeClr val="tx1"/>
-          </a:fontRef>
-        </p:style>
-      </p:cxnSp>
-      <p:sp>
-        <p:nvSpPr>
-          <p:cNvPr id="43" name="Rectangle: Rounded Corners 42">
-            <a:extLst>
-              <a:ext uri="{FF2B5EF4-FFF2-40B4-BE49-F238E27FC236}">
-                <a16:creationId xmlns:a16="http://schemas.microsoft.com/office/drawing/2014/main" id="{2523410D-48C4-4016-92C7-EAD431ADB7B2}"/>
-              </a:ext>
-            </a:extLst>
-          </p:cNvPr>
-          <p:cNvSpPr/>
-          <p:nvPr/>
-        </p:nvSpPr>
-        <p:spPr bwMode="gray">
-          <a:xfrm>
-            <a:off x="1424394" y="5061094"/>
-            <a:ext cx="4221488" cy="723014"/>
-          </a:xfrm>
-          <a:prstGeom prst="roundRect">
-            <a:avLst/>
-          </a:prstGeom>
-          <a:solidFill>
-            <a:schemeClr val="bg2">
-              <a:lumMod val="20000"/>
-              <a:lumOff val="80000"/>
-            </a:schemeClr>
-          </a:solidFill>
-          <a:ln>
-            <a:headEnd/>
-            <a:tailEnd/>
-          </a:ln>
-        </p:spPr>
-        <p:style>
-          <a:lnRef idx="2">
-            <a:schemeClr val="accent2"/>
-          </a:lnRef>
-          <a:fillRef idx="1">
-            <a:schemeClr val="lt1"/>
-          </a:fillRef>
-          <a:effectRef idx="0">
-            <a:schemeClr val="accent2"/>
-          </a:effectRef>
-          <a:fontRef idx="minor">
-            <a:schemeClr val="dk1"/>
-          </a:fontRef>
-        </p:style>
-        <p:txBody>
-          <a:bodyPr lIns="90000" tIns="72000" rIns="90000" bIns="72000" rtlCol="0" anchor="ctr"/>
-          <a:lstStyle/>
-          <a:p>
-            <a:pPr marR="0" algn="ctr" defTabSz="914400" eaLnBrk="1" fontAlgn="base" latinLnBrk="0" hangingPunct="1">
-              <a:lnSpc>
-                <a:spcPct val="100000"/>
-              </a:lnSpc>
-              <a:spcBef>
-                <a:spcPct val="50000"/>
-              </a:spcBef>
-              <a:spcAft>
-                <a:spcPct val="0"/>
-              </a:spcAft>
-              <a:buClr>
-                <a:srgbClr val="F0AB00"/>
-              </a:buClr>
-              <a:buSzPct val="80000"/>
-              <a:tabLst/>
-            </a:pPr>
-            <a:r>
-              <a:rPr kumimoji="0" lang="en-US" sz="2000" b="1" i="0" u="none" strike="noStrike" kern="0" cap="none" spc="0" normalizeH="0" baseline="0" noProof="0" dirty="0">
-                <a:ln>
-                  <a:noFill/>
-                </a:ln>
-                <a:effectLst/>
-                <a:uLnTx/>
-                <a:uFillTx/>
-                <a:ea typeface="Arial Unicode MS" pitchFamily="34" charset="-128"/>
-                <a:cs typeface="Arial Unicode MS" pitchFamily="34" charset="-128"/>
-              </a:rPr>
-              <a:t>Linux Kernel</a:t>
-            </a:r>
-            <a:endParaRPr kumimoji="0" lang="en-US" sz="1800" b="1" i="0" u="none" strike="noStrike" kern="0" cap="none" spc="0" normalizeH="0" baseline="0" noProof="0" dirty="0">
-              <a:ln>
-                <a:noFill/>
-              </a:ln>
-              <a:effectLst/>
-              <a:uLnTx/>
-              <a:uFillTx/>
-              <a:ea typeface="Arial Unicode MS" pitchFamily="34" charset="-128"/>
-              <a:cs typeface="Arial Unicode MS" pitchFamily="34" charset="-128"/>
-            </a:endParaRPr>
-          </a:p>
-        </p:txBody>
-      </p:sp>
-      <p:sp>
-        <p:nvSpPr>
-          <p:cNvPr id="51" name="Rectangle: Rounded Corners 50">
-            <a:extLst>
-              <a:ext uri="{FF2B5EF4-FFF2-40B4-BE49-F238E27FC236}">
-                <a16:creationId xmlns:a16="http://schemas.microsoft.com/office/drawing/2014/main" id="{7DE3B177-A7B0-4867-B54E-B383E5D84DF0}"/>
-              </a:ext>
-            </a:extLst>
-          </p:cNvPr>
-          <p:cNvSpPr/>
-          <p:nvPr/>
-        </p:nvSpPr>
-        <p:spPr bwMode="gray">
-          <a:xfrm>
-            <a:off x="2596211" y="1541716"/>
-            <a:ext cx="1877854" cy="686695"/>
-          </a:xfrm>
-          <a:prstGeom prst="roundRect">
-            <a:avLst/>
-          </a:prstGeom>
-          <a:ln>
-            <a:headEnd/>
-            <a:tailEnd/>
-          </a:ln>
-        </p:spPr>
-        <p:style>
-          <a:lnRef idx="2">
-            <a:schemeClr val="accent6"/>
-          </a:lnRef>
-          <a:fillRef idx="1">
-            <a:schemeClr val="lt1"/>
-          </a:fillRef>
-          <a:effectRef idx="0">
-            <a:schemeClr val="accent6"/>
-          </a:effectRef>
-          <a:fontRef idx="minor">
-            <a:schemeClr val="dk1"/>
-          </a:fontRef>
-        </p:style>
-        <p:txBody>
-          <a:bodyPr rot="0" spcFirstLastPara="0" vertOverflow="overflow" horzOverflow="overflow" vert="horz" wrap="square" lIns="90000" tIns="72000" rIns="90000" bIns="72000" numCol="1" spcCol="0" rtlCol="0" fromWordArt="0" anchor="ctr" anchorCtr="0" forceAA="0" compatLnSpc="1">
-            <a:prstTxWarp prst="textNoShape">
-              <a:avLst/>
-            </a:prstTxWarp>
-            <a:noAutofit/>
-          </a:bodyPr>
-          <a:lstStyle/>
-          <a:p>
-            <a:pPr algn="ctr" defTabSz="914400" fontAlgn="base">
-              <a:spcBef>
-                <a:spcPct val="50000"/>
-              </a:spcBef>
-              <a:spcAft>
-                <a:spcPct val="0"/>
-              </a:spcAft>
-              <a:buClr>
-                <a:srgbClr val="F0AB00"/>
-              </a:buClr>
-              <a:buSzPct val="80000"/>
-            </a:pPr>
-            <a:r>
-              <a:rPr lang="en-US" sz="1800" kern="0" dirty="0">
-                <a:solidFill>
-                  <a:schemeClr val="dk1"/>
-                </a:solidFill>
-                <a:latin typeface="+mn-lt"/>
-                <a:ea typeface="Arial Unicode MS" pitchFamily="34" charset="-128"/>
-              </a:rPr>
-              <a:t>API Server</a:t>
-            </a:r>
-          </a:p>
-        </p:txBody>
-      </p:sp>
-      <p:sp>
-        <p:nvSpPr>
-          <p:cNvPr id="50" name="Title 49">
-            <a:extLst>
-              <a:ext uri="{FF2B5EF4-FFF2-40B4-BE49-F238E27FC236}">
-                <a16:creationId xmlns:a16="http://schemas.microsoft.com/office/drawing/2014/main" id="{7D480E47-3DD1-4ACF-8C6E-41D6F9D75F58}"/>
-              </a:ext>
-            </a:extLst>
-          </p:cNvPr>
-          <p:cNvSpPr>
-            <a:spLocks noGrp="1"/>
-          </p:cNvSpPr>
-          <p:nvPr>
-            <p:ph type="title"/>
-          </p:nvPr>
-        </p:nvSpPr>
-        <p:spPr/>
-        <p:txBody>
-          <a:bodyPr/>
-          <a:lstStyle/>
-          <a:p>
-            <a:r>
-              <a:rPr lang="en-US" dirty="0"/>
-              <a:t>Scenario 1: Bitcoin, Ethereum, </a:t>
-            </a:r>
-            <a:r>
-              <a:rPr lang="en-US" dirty="0" err="1"/>
-              <a:t>Monero</a:t>
-            </a:r>
-            <a:r>
-              <a:rPr lang="en-US" dirty="0"/>
-              <a:t>!</a:t>
-            </a:r>
-          </a:p>
-        </p:txBody>
-      </p:sp>
-      <p:sp>
-        <p:nvSpPr>
-          <p:cNvPr id="2" name="Cloud 1">
-            <a:extLst>
-              <a:ext uri="{FF2B5EF4-FFF2-40B4-BE49-F238E27FC236}">
-                <a16:creationId xmlns:a16="http://schemas.microsoft.com/office/drawing/2014/main" id="{D4F0E42D-30E8-4AD3-BDAA-9E16ABB6973D}"/>
-              </a:ext>
-            </a:extLst>
-          </p:cNvPr>
-          <p:cNvSpPr/>
-          <p:nvPr/>
-        </p:nvSpPr>
-        <p:spPr bwMode="gray">
-          <a:xfrm>
-            <a:off x="6989398" y="929734"/>
-            <a:ext cx="2054586" cy="1658675"/>
-          </a:xfrm>
-          <a:prstGeom prst="cloud">
-            <a:avLst/>
-          </a:prstGeom>
-          <a:solidFill>
-            <a:schemeClr val="bg2">
-              <a:lumMod val="40000"/>
-              <a:lumOff val="60000"/>
-            </a:schemeClr>
-          </a:solidFill>
-          <a:ln w="6350" algn="ctr">
-            <a:noFill/>
-            <a:miter lim="800000"/>
-            <a:headEnd/>
-            <a:tailEnd/>
-          </a:ln>
-        </p:spPr>
-        <p:txBody>
-          <a:bodyPr lIns="90000" tIns="72000" rIns="90000" bIns="72000" rtlCol="0" anchor="ctr"/>
-          <a:lstStyle/>
-          <a:p>
-            <a:pPr marR="0" algn="ctr" defTabSz="914400" eaLnBrk="1" fontAlgn="base" latinLnBrk="0" hangingPunct="1">
-              <a:lnSpc>
-                <a:spcPct val="100000"/>
-              </a:lnSpc>
-              <a:spcBef>
-                <a:spcPct val="50000"/>
-              </a:spcBef>
-              <a:spcAft>
-                <a:spcPct val="0"/>
-              </a:spcAft>
-              <a:buClr>
-                <a:srgbClr val="F0AB00"/>
-              </a:buClr>
-              <a:buSzPct val="80000"/>
-              <a:tabLst/>
-            </a:pPr>
-            <a:r>
-              <a:rPr kumimoji="0" lang="en-US" sz="1800" b="1" i="0" u="none" strike="noStrike" kern="0" cap="none" spc="0" normalizeH="0" baseline="0" noProof="0" dirty="0">
-                <a:ln>
-                  <a:noFill/>
-                </a:ln>
-                <a:effectLst/>
-                <a:uLnTx/>
-                <a:uFillTx/>
-                <a:ea typeface="Arial Unicode MS" pitchFamily="34" charset="-128"/>
-                <a:cs typeface="Arial Unicode MS" pitchFamily="34" charset="-128"/>
-              </a:rPr>
-              <a:t>Internet</a:t>
-            </a:r>
-          </a:p>
-        </p:txBody>
-      </p:sp>
-      <p:sp>
-        <p:nvSpPr>
-          <p:cNvPr id="20" name="TextBox 19">
-            <a:extLst>
-              <a:ext uri="{FF2B5EF4-FFF2-40B4-BE49-F238E27FC236}">
-                <a16:creationId xmlns:a16="http://schemas.microsoft.com/office/drawing/2014/main" id="{3FC79A34-F218-447B-8C61-1E171A5941BB}"/>
-              </a:ext>
-            </a:extLst>
-          </p:cNvPr>
-          <p:cNvSpPr txBox="1"/>
-          <p:nvPr/>
-        </p:nvSpPr>
-        <p:spPr>
-          <a:xfrm>
-            <a:off x="1735718" y="3203057"/>
-            <a:ext cx="3598840" cy="1107996"/>
-          </a:xfrm>
-          <a:prstGeom prst="rect">
-            <a:avLst/>
-          </a:prstGeom>
-          <a:solidFill>
-            <a:schemeClr val="bg2">
-              <a:lumMod val="20000"/>
-              <a:lumOff val="80000"/>
-            </a:schemeClr>
-          </a:solidFill>
-        </p:spPr>
-        <p:txBody>
-          <a:bodyPr wrap="square" lIns="0" tIns="0" rIns="0" bIns="0" rtlCol="0">
-            <a:spAutoFit/>
-          </a:bodyPr>
-          <a:lstStyle/>
-          <a:p>
-            <a:pPr fontAlgn="base">
-              <a:spcBef>
-                <a:spcPct val="50000"/>
-              </a:spcBef>
-              <a:spcAft>
-                <a:spcPct val="0"/>
-              </a:spcAft>
-              <a:buClr>
-                <a:srgbClr val="F0AB00"/>
-              </a:buClr>
-              <a:buSzPct val="80000"/>
-            </a:pPr>
-            <a:r>
-              <a:rPr lang="en-US" sz="1800" kern="0" dirty="0" err="1">
-                <a:latin typeface="Courier New" panose="02070309020205020404" pitchFamily="49" charset="0"/>
-                <a:ea typeface="Arial Unicode MS" pitchFamily="34" charset="-128"/>
-                <a:cs typeface="Courier New" panose="02070309020205020404" pitchFamily="49" charset="0"/>
-              </a:rPr>
-              <a:t>root@container</a:t>
-            </a:r>
-            <a:r>
-              <a:rPr lang="en-US" sz="1800" kern="0" dirty="0">
-                <a:latin typeface="Courier New" panose="02070309020205020404" pitchFamily="49" charset="0"/>
-                <a:ea typeface="Arial Unicode MS" pitchFamily="34" charset="-128"/>
-                <a:cs typeface="Courier New" panose="02070309020205020404" pitchFamily="49" charset="0"/>
-              </a:rPr>
-              <a:t>:$</a:t>
-            </a:r>
-          </a:p>
-          <a:p>
-            <a:pPr fontAlgn="base">
-              <a:spcBef>
-                <a:spcPct val="50000"/>
-              </a:spcBef>
-              <a:spcAft>
-                <a:spcPct val="0"/>
-              </a:spcAft>
-              <a:buClr>
-                <a:srgbClr val="F0AB00"/>
-              </a:buClr>
-              <a:buSzPct val="80000"/>
-            </a:pPr>
-            <a:r>
-              <a:rPr lang="en-US" sz="1800" kern="0" dirty="0">
-                <a:latin typeface="Courier New" panose="02070309020205020404" pitchFamily="49" charset="0"/>
-                <a:ea typeface="Arial Unicode MS" pitchFamily="34" charset="-128"/>
-                <a:cs typeface="Courier New" panose="02070309020205020404" pitchFamily="49" charset="0"/>
-              </a:rPr>
-              <a:t>&gt; apt install &lt;some miner&gt;</a:t>
-            </a:r>
-          </a:p>
-          <a:p>
-            <a:pPr fontAlgn="base">
-              <a:spcBef>
-                <a:spcPct val="50000"/>
-              </a:spcBef>
-              <a:spcAft>
-                <a:spcPct val="0"/>
-              </a:spcAft>
-              <a:buClr>
-                <a:srgbClr val="F0AB00"/>
-              </a:buClr>
-              <a:buSzPct val="80000"/>
-            </a:pPr>
-            <a:r>
-              <a:rPr lang="en-US" sz="1800" kern="0" dirty="0">
-                <a:latin typeface="Courier New" panose="02070309020205020404" pitchFamily="49" charset="0"/>
-                <a:ea typeface="Arial Unicode MS" pitchFamily="34" charset="-128"/>
-                <a:cs typeface="Courier New" panose="02070309020205020404" pitchFamily="49" charset="0"/>
-              </a:rPr>
-              <a:t>&gt; € € € € € € € € €...</a:t>
-            </a:r>
-          </a:p>
-        </p:txBody>
-      </p:sp>
-      <p:cxnSp>
-        <p:nvCxnSpPr>
-          <p:cNvPr id="22" name="Connector: Elbow 21">
-            <a:extLst>
-              <a:ext uri="{FF2B5EF4-FFF2-40B4-BE49-F238E27FC236}">
-                <a16:creationId xmlns:a16="http://schemas.microsoft.com/office/drawing/2014/main" id="{8870909F-3F3C-4B60-A7F2-656FD357233E}"/>
-              </a:ext>
-            </a:extLst>
-          </p:cNvPr>
-          <p:cNvCxnSpPr>
-            <a:cxnSpLocks/>
-            <a:stCxn id="20" idx="3"/>
-            <a:endCxn id="2" idx="1"/>
-          </p:cNvCxnSpPr>
-          <p:nvPr/>
-        </p:nvCxnSpPr>
-        <p:spPr>
-          <a:xfrm flipV="1">
-            <a:off x="5334558" y="2586643"/>
-            <a:ext cx="2682133" cy="1170412"/>
-          </a:xfrm>
-          <a:prstGeom prst="bentConnector2">
-            <a:avLst/>
-          </a:prstGeom>
-          <a:ln w="57150">
-            <a:solidFill>
-              <a:schemeClr val="accent5">
-                <a:lumMod val="75000"/>
-              </a:schemeClr>
-            </a:solidFill>
-            <a:headEnd type="none" w="med" len="med"/>
-            <a:tailEnd type="none" w="med" len="med"/>
-          </a:ln>
-        </p:spPr>
-        <p:style>
-          <a:lnRef idx="1">
-            <a:schemeClr val="accent1"/>
-          </a:lnRef>
-          <a:fillRef idx="0">
-            <a:schemeClr val="accent1"/>
-          </a:fillRef>
-          <a:effectRef idx="0">
-            <a:schemeClr val="accent1"/>
-          </a:effectRef>
-          <a:fontRef idx="minor">
-            <a:schemeClr val="tx1"/>
-          </a:fontRef>
-        </p:style>
-      </p:cxnSp>
-      <p:pic>
-        <p:nvPicPr>
-          <p:cNvPr id="17" name="Graphic 16" descr="Coins">
-            <a:extLst>
-              <a:ext uri="{FF2B5EF4-FFF2-40B4-BE49-F238E27FC236}">
-                <a16:creationId xmlns:a16="http://schemas.microsoft.com/office/drawing/2014/main" id="{D9919339-C5F4-46D3-BCAA-DADD401DD3D3}"/>
-              </a:ext>
-            </a:extLst>
-          </p:cNvPr>
-          <p:cNvPicPr>
-            <a:picLocks noChangeAspect="1"/>
-          </p:cNvPicPr>
-          <p:nvPr/>
-        </p:nvPicPr>
-        <p:blipFill>
-          <a:blip r:embed="rId3">
-            <a:extLst>
-              <a:ext uri="{96DAC541-7B7A-43D3-8B79-37D633B846F1}">
-                <asvg:svgBlip xmlns:asvg="http://schemas.microsoft.com/office/drawing/2016/SVG/main" r:embed="rId4"/>
-              </a:ext>
-            </a:extLst>
-          </a:blip>
-          <a:stretch>
-            <a:fillRect/>
-          </a:stretch>
-        </p:blipFill>
-        <p:spPr>
-          <a:xfrm>
-            <a:off x="6971158" y="2695147"/>
-            <a:ext cx="914400" cy="914400"/>
-          </a:xfrm>
-          <a:prstGeom prst="rect">
-            <a:avLst/>
-          </a:prstGeom>
-        </p:spPr>
-      </p:pic>
-    </p:spTree>
-    <p:extLst>
-      <p:ext uri="{BB962C8B-B14F-4D97-AF65-F5344CB8AC3E}">
-        <p14:creationId xmlns:p14="http://schemas.microsoft.com/office/powerpoint/2010/main" val="1212405617"/>
       </p:ext>
     </p:extLst>
   </p:cSld>
@@ -26103,6 +25537,801 @@
           <a:p>
             <a:r>
               <a:rPr lang="en-US" dirty="0"/>
+              <a:t>Scenario 1: Bitcoin, Ethereum, </a:t>
+            </a:r>
+            <a:r>
+              <a:rPr lang="en-US" dirty="0" err="1"/>
+              <a:t>Monero</a:t>
+            </a:r>
+            <a:r>
+              <a:rPr lang="en-US" dirty="0"/>
+              <a:t>!</a:t>
+            </a:r>
+          </a:p>
+        </p:txBody>
+      </p:sp>
+      <p:sp>
+        <p:nvSpPr>
+          <p:cNvPr id="2" name="Cloud 1">
+            <a:extLst>
+              <a:ext uri="{FF2B5EF4-FFF2-40B4-BE49-F238E27FC236}">
+                <a16:creationId xmlns:a16="http://schemas.microsoft.com/office/drawing/2014/main" id="{D4F0E42D-30E8-4AD3-BDAA-9E16ABB6973D}"/>
+              </a:ext>
+            </a:extLst>
+          </p:cNvPr>
+          <p:cNvSpPr/>
+          <p:nvPr/>
+        </p:nvSpPr>
+        <p:spPr bwMode="gray">
+          <a:xfrm>
+            <a:off x="6989398" y="929734"/>
+            <a:ext cx="2054586" cy="1658675"/>
+          </a:xfrm>
+          <a:prstGeom prst="cloud">
+            <a:avLst/>
+          </a:prstGeom>
+          <a:solidFill>
+            <a:schemeClr val="bg2">
+              <a:lumMod val="40000"/>
+              <a:lumOff val="60000"/>
+            </a:schemeClr>
+          </a:solidFill>
+          <a:ln w="6350" algn="ctr">
+            <a:noFill/>
+            <a:miter lim="800000"/>
+            <a:headEnd/>
+            <a:tailEnd/>
+          </a:ln>
+        </p:spPr>
+        <p:txBody>
+          <a:bodyPr lIns="90000" tIns="72000" rIns="90000" bIns="72000" rtlCol="0" anchor="ctr"/>
+          <a:lstStyle/>
+          <a:p>
+            <a:pPr marR="0" algn="ctr" defTabSz="914400" eaLnBrk="1" fontAlgn="base" latinLnBrk="0" hangingPunct="1">
+              <a:lnSpc>
+                <a:spcPct val="100000"/>
+              </a:lnSpc>
+              <a:spcBef>
+                <a:spcPct val="50000"/>
+              </a:spcBef>
+              <a:spcAft>
+                <a:spcPct val="0"/>
+              </a:spcAft>
+              <a:buClr>
+                <a:srgbClr val="F0AB00"/>
+              </a:buClr>
+              <a:buSzPct val="80000"/>
+              <a:tabLst/>
+            </a:pPr>
+            <a:r>
+              <a:rPr kumimoji="0" lang="en-US" sz="1800" b="1" i="0" u="none" strike="noStrike" kern="0" cap="none" spc="0" normalizeH="0" baseline="0" noProof="0" dirty="0">
+                <a:ln>
+                  <a:noFill/>
+                </a:ln>
+                <a:effectLst/>
+                <a:uLnTx/>
+                <a:uFillTx/>
+                <a:ea typeface="Arial Unicode MS" pitchFamily="34" charset="-128"/>
+                <a:cs typeface="Arial Unicode MS" pitchFamily="34" charset="-128"/>
+              </a:rPr>
+              <a:t>Internet</a:t>
+            </a:r>
+          </a:p>
+        </p:txBody>
+      </p:sp>
+      <p:sp>
+        <p:nvSpPr>
+          <p:cNvPr id="20" name="TextBox 19">
+            <a:extLst>
+              <a:ext uri="{FF2B5EF4-FFF2-40B4-BE49-F238E27FC236}">
+                <a16:creationId xmlns:a16="http://schemas.microsoft.com/office/drawing/2014/main" id="{3FC79A34-F218-447B-8C61-1E171A5941BB}"/>
+              </a:ext>
+            </a:extLst>
+          </p:cNvPr>
+          <p:cNvSpPr txBox="1"/>
+          <p:nvPr/>
+        </p:nvSpPr>
+        <p:spPr>
+          <a:xfrm>
+            <a:off x="1735718" y="3203057"/>
+            <a:ext cx="3598840" cy="1107996"/>
+          </a:xfrm>
+          <a:prstGeom prst="rect">
+            <a:avLst/>
+          </a:prstGeom>
+          <a:solidFill>
+            <a:schemeClr val="bg2">
+              <a:lumMod val="20000"/>
+              <a:lumOff val="80000"/>
+            </a:schemeClr>
+          </a:solidFill>
+        </p:spPr>
+        <p:txBody>
+          <a:bodyPr wrap="square" lIns="0" tIns="0" rIns="0" bIns="0" rtlCol="0">
+            <a:spAutoFit/>
+          </a:bodyPr>
+          <a:lstStyle/>
+          <a:p>
+            <a:pPr fontAlgn="base">
+              <a:spcBef>
+                <a:spcPct val="50000"/>
+              </a:spcBef>
+              <a:spcAft>
+                <a:spcPct val="0"/>
+              </a:spcAft>
+              <a:buClr>
+                <a:srgbClr val="F0AB00"/>
+              </a:buClr>
+              <a:buSzPct val="80000"/>
+            </a:pPr>
+            <a:r>
+              <a:rPr lang="en-US" sz="1800" kern="0" dirty="0" err="1">
+                <a:latin typeface="Courier New" panose="02070309020205020404" pitchFamily="49" charset="0"/>
+                <a:ea typeface="Arial Unicode MS" pitchFamily="34" charset="-128"/>
+                <a:cs typeface="Courier New" panose="02070309020205020404" pitchFamily="49" charset="0"/>
+              </a:rPr>
+              <a:t>root@container</a:t>
+            </a:r>
+            <a:r>
+              <a:rPr lang="en-US" sz="1800" kern="0" dirty="0">
+                <a:latin typeface="Courier New" panose="02070309020205020404" pitchFamily="49" charset="0"/>
+                <a:ea typeface="Arial Unicode MS" pitchFamily="34" charset="-128"/>
+                <a:cs typeface="Courier New" panose="02070309020205020404" pitchFamily="49" charset="0"/>
+              </a:rPr>
+              <a:t>:$</a:t>
+            </a:r>
+          </a:p>
+          <a:p>
+            <a:pPr fontAlgn="base">
+              <a:spcBef>
+                <a:spcPct val="50000"/>
+              </a:spcBef>
+              <a:spcAft>
+                <a:spcPct val="0"/>
+              </a:spcAft>
+              <a:buClr>
+                <a:srgbClr val="F0AB00"/>
+              </a:buClr>
+              <a:buSzPct val="80000"/>
+            </a:pPr>
+            <a:r>
+              <a:rPr lang="en-US" sz="1800" kern="0" dirty="0">
+                <a:latin typeface="Courier New" panose="02070309020205020404" pitchFamily="49" charset="0"/>
+                <a:ea typeface="Arial Unicode MS" pitchFamily="34" charset="-128"/>
+                <a:cs typeface="Courier New" panose="02070309020205020404" pitchFamily="49" charset="0"/>
+              </a:rPr>
+              <a:t>&gt; apt install &lt;some miner&gt;</a:t>
+            </a:r>
+          </a:p>
+          <a:p>
+            <a:pPr fontAlgn="base">
+              <a:spcBef>
+                <a:spcPct val="50000"/>
+              </a:spcBef>
+              <a:spcAft>
+                <a:spcPct val="0"/>
+              </a:spcAft>
+              <a:buClr>
+                <a:srgbClr val="F0AB00"/>
+              </a:buClr>
+              <a:buSzPct val="80000"/>
+            </a:pPr>
+            <a:r>
+              <a:rPr lang="en-US" sz="1800" kern="0" dirty="0">
+                <a:latin typeface="Courier New" panose="02070309020205020404" pitchFamily="49" charset="0"/>
+                <a:ea typeface="Arial Unicode MS" pitchFamily="34" charset="-128"/>
+                <a:cs typeface="Courier New" panose="02070309020205020404" pitchFamily="49" charset="0"/>
+              </a:rPr>
+              <a:t>&gt; € € € € € € € € €...</a:t>
+            </a:r>
+          </a:p>
+        </p:txBody>
+      </p:sp>
+      <p:cxnSp>
+        <p:nvCxnSpPr>
+          <p:cNvPr id="22" name="Connector: Elbow 21">
+            <a:extLst>
+              <a:ext uri="{FF2B5EF4-FFF2-40B4-BE49-F238E27FC236}">
+                <a16:creationId xmlns:a16="http://schemas.microsoft.com/office/drawing/2014/main" id="{8870909F-3F3C-4B60-A7F2-656FD357233E}"/>
+              </a:ext>
+            </a:extLst>
+          </p:cNvPr>
+          <p:cNvCxnSpPr>
+            <a:cxnSpLocks/>
+            <a:stCxn id="20" idx="3"/>
+            <a:endCxn id="2" idx="1"/>
+          </p:cNvCxnSpPr>
+          <p:nvPr/>
+        </p:nvCxnSpPr>
+        <p:spPr>
+          <a:xfrm flipV="1">
+            <a:off x="5334558" y="2586643"/>
+            <a:ext cx="2682133" cy="1170412"/>
+          </a:xfrm>
+          <a:prstGeom prst="bentConnector2">
+            <a:avLst/>
+          </a:prstGeom>
+          <a:ln w="57150">
+            <a:solidFill>
+              <a:schemeClr val="accent5">
+                <a:lumMod val="75000"/>
+              </a:schemeClr>
+            </a:solidFill>
+            <a:headEnd type="none" w="med" len="med"/>
+            <a:tailEnd type="none" w="med" len="med"/>
+          </a:ln>
+        </p:spPr>
+        <p:style>
+          <a:lnRef idx="1">
+            <a:schemeClr val="accent1"/>
+          </a:lnRef>
+          <a:fillRef idx="0">
+            <a:schemeClr val="accent1"/>
+          </a:fillRef>
+          <a:effectRef idx="0">
+            <a:schemeClr val="accent1"/>
+          </a:effectRef>
+          <a:fontRef idx="minor">
+            <a:schemeClr val="tx1"/>
+          </a:fontRef>
+        </p:style>
+      </p:cxnSp>
+      <p:pic>
+        <p:nvPicPr>
+          <p:cNvPr id="17" name="Graphic 16" descr="Coins">
+            <a:extLst>
+              <a:ext uri="{FF2B5EF4-FFF2-40B4-BE49-F238E27FC236}">
+                <a16:creationId xmlns:a16="http://schemas.microsoft.com/office/drawing/2014/main" id="{D9919339-C5F4-46D3-BCAA-DADD401DD3D3}"/>
+              </a:ext>
+            </a:extLst>
+          </p:cNvPr>
+          <p:cNvPicPr>
+            <a:picLocks noChangeAspect="1"/>
+          </p:cNvPicPr>
+          <p:nvPr/>
+        </p:nvPicPr>
+        <p:blipFill>
+          <a:blip r:embed="rId3">
+            <a:extLst>
+              <a:ext uri="{96DAC541-7B7A-43D3-8B79-37D633B846F1}">
+                <asvg:svgBlip xmlns:asvg="http://schemas.microsoft.com/office/drawing/2016/SVG/main" r:embed="rId4"/>
+              </a:ext>
+            </a:extLst>
+          </a:blip>
+          <a:stretch>
+            <a:fillRect/>
+          </a:stretch>
+        </p:blipFill>
+        <p:spPr>
+          <a:xfrm>
+            <a:off x="6971158" y="2695147"/>
+            <a:ext cx="914400" cy="914400"/>
+          </a:xfrm>
+          <a:prstGeom prst="rect">
+            <a:avLst/>
+          </a:prstGeom>
+        </p:spPr>
+      </p:pic>
+    </p:spTree>
+    <p:extLst>
+      <p:ext uri="{BB962C8B-B14F-4D97-AF65-F5344CB8AC3E}">
+        <p14:creationId xmlns:p14="http://schemas.microsoft.com/office/powerpoint/2010/main" val="1212405617"/>
+      </p:ext>
+    </p:extLst>
+  </p:cSld>
+  <p:clrMapOvr>
+    <a:masterClrMapping/>
+  </p:clrMapOvr>
+</p:sld>
+</file>
+
+<file path=ppt/slides/slide21.xml><?xml version="1.0" encoding="utf-8"?>
+<p:sld xmlns:a="http://schemas.openxmlformats.org/drawingml/2006/main" xmlns:r="http://schemas.openxmlformats.org/officeDocument/2006/relationships" xmlns:p="http://schemas.openxmlformats.org/presentationml/2006/main">
+  <p:cSld>
+    <p:spTree>
+      <p:nvGrpSpPr>
+        <p:cNvPr id="1" name=""/>
+        <p:cNvGrpSpPr/>
+        <p:nvPr/>
+      </p:nvGrpSpPr>
+      <p:grpSpPr>
+        <a:xfrm>
+          <a:off x="0" y="0"/>
+          <a:ext cx="0" cy="0"/>
+          <a:chOff x="0" y="0"/>
+          <a:chExt cx="0" cy="0"/>
+        </a:xfrm>
+      </p:grpSpPr>
+      <p:sp>
+        <p:nvSpPr>
+          <p:cNvPr id="39" name="Rectangle: Rounded Corners 38">
+            <a:extLst>
+              <a:ext uri="{FF2B5EF4-FFF2-40B4-BE49-F238E27FC236}">
+                <a16:creationId xmlns:a16="http://schemas.microsoft.com/office/drawing/2014/main" id="{6B05395E-1844-476D-AB95-17A4127B8AE6}"/>
+              </a:ext>
+            </a:extLst>
+          </p:cNvPr>
+          <p:cNvSpPr/>
+          <p:nvPr/>
+        </p:nvSpPr>
+        <p:spPr bwMode="gray">
+          <a:xfrm>
+            <a:off x="1269557" y="2926601"/>
+            <a:ext cx="4531162" cy="3484827"/>
+          </a:xfrm>
+          <a:prstGeom prst="roundRect">
+            <a:avLst/>
+          </a:prstGeom>
+          <a:solidFill>
+            <a:schemeClr val="tx2"/>
+          </a:solidFill>
+          <a:ln>
+            <a:headEnd/>
+            <a:tailEnd/>
+          </a:ln>
+        </p:spPr>
+        <p:style>
+          <a:lnRef idx="2">
+            <a:schemeClr val="accent2"/>
+          </a:lnRef>
+          <a:fillRef idx="1">
+            <a:schemeClr val="lt1"/>
+          </a:fillRef>
+          <a:effectRef idx="0">
+            <a:schemeClr val="accent2"/>
+          </a:effectRef>
+          <a:fontRef idx="minor">
+            <a:schemeClr val="dk1"/>
+          </a:fontRef>
+        </p:style>
+        <p:txBody>
+          <a:bodyPr lIns="90000" tIns="72000" rIns="90000" bIns="72000" rtlCol="0" anchor="b"/>
+          <a:lstStyle/>
+          <a:p>
+            <a:pPr marR="0" algn="ctr" defTabSz="914400" eaLnBrk="1" fontAlgn="base" latinLnBrk="0" hangingPunct="1">
+              <a:lnSpc>
+                <a:spcPct val="100000"/>
+              </a:lnSpc>
+              <a:spcBef>
+                <a:spcPct val="50000"/>
+              </a:spcBef>
+              <a:spcAft>
+                <a:spcPct val="0"/>
+              </a:spcAft>
+              <a:buClr>
+                <a:srgbClr val="F0AB00"/>
+              </a:buClr>
+              <a:buSzPct val="80000"/>
+              <a:tabLst/>
+            </a:pPr>
+            <a:r>
+              <a:rPr kumimoji="0" lang="en-US" sz="2000" b="1" i="0" u="none" strike="noStrike" kern="0" cap="none" spc="0" normalizeH="0" baseline="0" noProof="0" dirty="0">
+                <a:ln>
+                  <a:noFill/>
+                </a:ln>
+                <a:effectLst/>
+                <a:uLnTx/>
+                <a:uFillTx/>
+                <a:ea typeface="Arial Unicode MS" pitchFamily="34" charset="-128"/>
+                <a:cs typeface="Arial Unicode MS" pitchFamily="34" charset="-128"/>
+              </a:rPr>
+              <a:t>Host</a:t>
+            </a:r>
+            <a:endParaRPr kumimoji="0" lang="en-US" sz="1800" b="1" i="0" u="none" strike="noStrike" kern="0" cap="none" spc="0" normalizeH="0" baseline="0" noProof="0" dirty="0">
+              <a:ln>
+                <a:noFill/>
+              </a:ln>
+              <a:effectLst/>
+              <a:uLnTx/>
+              <a:uFillTx/>
+              <a:ea typeface="Arial Unicode MS" pitchFamily="34" charset="-128"/>
+              <a:cs typeface="Arial Unicode MS" pitchFamily="34" charset="-128"/>
+            </a:endParaRPr>
+          </a:p>
+        </p:txBody>
+      </p:sp>
+      <p:sp>
+        <p:nvSpPr>
+          <p:cNvPr id="40" name="Rectangle: Rounded Corners 39">
+            <a:extLst>
+              <a:ext uri="{FF2B5EF4-FFF2-40B4-BE49-F238E27FC236}">
+                <a16:creationId xmlns:a16="http://schemas.microsoft.com/office/drawing/2014/main" id="{01EB7DF5-45EB-4252-81B1-36C6C146EC09}"/>
+              </a:ext>
+            </a:extLst>
+          </p:cNvPr>
+          <p:cNvSpPr/>
+          <p:nvPr/>
+        </p:nvSpPr>
+        <p:spPr bwMode="gray">
+          <a:xfrm>
+            <a:off x="1269557" y="1008652"/>
+            <a:ext cx="4531162" cy="1743402"/>
+          </a:xfrm>
+          <a:prstGeom prst="roundRect">
+            <a:avLst/>
+          </a:prstGeom>
+          <a:ln>
+            <a:headEnd/>
+            <a:tailEnd/>
+          </a:ln>
+        </p:spPr>
+        <p:style>
+          <a:lnRef idx="2">
+            <a:schemeClr val="accent6"/>
+          </a:lnRef>
+          <a:fillRef idx="1">
+            <a:schemeClr val="lt1"/>
+          </a:fillRef>
+          <a:effectRef idx="0">
+            <a:schemeClr val="accent6"/>
+          </a:effectRef>
+          <a:fontRef idx="minor">
+            <a:schemeClr val="dk1"/>
+          </a:fontRef>
+        </p:style>
+        <p:txBody>
+          <a:bodyPr lIns="90000" tIns="72000" rIns="90000" bIns="72000" rtlCol="0" anchor="t"/>
+          <a:lstStyle/>
+          <a:p>
+            <a:pPr marR="0" algn="ctr" defTabSz="914400" eaLnBrk="1" fontAlgn="base" latinLnBrk="0" hangingPunct="1">
+              <a:lnSpc>
+                <a:spcPct val="100000"/>
+              </a:lnSpc>
+              <a:spcBef>
+                <a:spcPct val="50000"/>
+              </a:spcBef>
+              <a:spcAft>
+                <a:spcPct val="0"/>
+              </a:spcAft>
+              <a:buClr>
+                <a:srgbClr val="F0AB00"/>
+              </a:buClr>
+              <a:buSzPct val="80000"/>
+              <a:tabLst/>
+            </a:pPr>
+            <a:r>
+              <a:rPr kumimoji="0" lang="en-US" sz="2000" b="1" i="0" u="none" strike="noStrike" kern="0" cap="none" spc="0" normalizeH="0" baseline="0" noProof="0" dirty="0">
+                <a:ln>
+                  <a:noFill/>
+                </a:ln>
+                <a:effectLst/>
+                <a:uLnTx/>
+                <a:uFillTx/>
+                <a:ea typeface="Arial Unicode MS" pitchFamily="34" charset="-128"/>
+                <a:cs typeface="Arial Unicode MS" pitchFamily="34" charset="-128"/>
+              </a:rPr>
+              <a:t>K8s</a:t>
+            </a:r>
+            <a:endParaRPr kumimoji="0" lang="en-US" sz="1800" b="1" i="0" u="none" strike="noStrike" kern="0" cap="none" spc="0" normalizeH="0" baseline="0" noProof="0" dirty="0">
+              <a:ln>
+                <a:noFill/>
+              </a:ln>
+              <a:effectLst/>
+              <a:uLnTx/>
+              <a:uFillTx/>
+              <a:ea typeface="Arial Unicode MS" pitchFamily="34" charset="-128"/>
+              <a:cs typeface="Arial Unicode MS" pitchFamily="34" charset="-128"/>
+            </a:endParaRPr>
+          </a:p>
+        </p:txBody>
+      </p:sp>
+      <p:sp>
+        <p:nvSpPr>
+          <p:cNvPr id="41" name="Rectangle: Rounded Corners 40">
+            <a:extLst>
+              <a:ext uri="{FF2B5EF4-FFF2-40B4-BE49-F238E27FC236}">
+                <a16:creationId xmlns:a16="http://schemas.microsoft.com/office/drawing/2014/main" id="{84440113-9D89-45D0-8A5F-AB6580792D6B}"/>
+              </a:ext>
+            </a:extLst>
+          </p:cNvPr>
+          <p:cNvSpPr/>
+          <p:nvPr/>
+        </p:nvSpPr>
+        <p:spPr bwMode="gray">
+          <a:xfrm>
+            <a:off x="1642716" y="2402958"/>
+            <a:ext cx="3784845" cy="2172586"/>
+          </a:xfrm>
+          <a:prstGeom prst="roundRect">
+            <a:avLst/>
+          </a:prstGeom>
+          <a:ln>
+            <a:headEnd/>
+            <a:tailEnd/>
+          </a:ln>
+        </p:spPr>
+        <p:style>
+          <a:lnRef idx="2">
+            <a:schemeClr val="accent2"/>
+          </a:lnRef>
+          <a:fillRef idx="1">
+            <a:schemeClr val="lt1"/>
+          </a:fillRef>
+          <a:effectRef idx="0">
+            <a:schemeClr val="accent2"/>
+          </a:effectRef>
+          <a:fontRef idx="minor">
+            <a:schemeClr val="dk1"/>
+          </a:fontRef>
+        </p:style>
+        <p:txBody>
+          <a:bodyPr lIns="90000" tIns="72000" rIns="90000" bIns="72000" rtlCol="0" anchor="t"/>
+          <a:lstStyle/>
+          <a:p>
+            <a:pPr marR="0" algn="ctr" defTabSz="914400" eaLnBrk="1" fontAlgn="base" latinLnBrk="0" hangingPunct="1">
+              <a:lnSpc>
+                <a:spcPct val="100000"/>
+              </a:lnSpc>
+              <a:spcBef>
+                <a:spcPct val="50000"/>
+              </a:spcBef>
+              <a:spcAft>
+                <a:spcPct val="0"/>
+              </a:spcAft>
+              <a:buClr>
+                <a:srgbClr val="F0AB00"/>
+              </a:buClr>
+              <a:buSzPct val="80000"/>
+              <a:tabLst/>
+            </a:pPr>
+            <a:r>
+              <a:rPr kumimoji="0" lang="en-US" sz="2000" b="1" i="0" u="none" strike="noStrike" kern="0" cap="none" spc="0" normalizeH="0" baseline="0" noProof="0">
+                <a:ln>
+                  <a:noFill/>
+                </a:ln>
+                <a:effectLst/>
+                <a:uLnTx/>
+                <a:uFillTx/>
+                <a:ea typeface="Arial Unicode MS" pitchFamily="34" charset="-128"/>
+                <a:cs typeface="Arial Unicode MS" pitchFamily="34" charset="-128"/>
+              </a:rPr>
+              <a:t>Container</a:t>
+            </a:r>
+            <a:endParaRPr kumimoji="0" lang="en-US" sz="1800" b="1" i="0" u="none" strike="noStrike" kern="0" cap="none" spc="0" normalizeH="0" baseline="0" noProof="0" dirty="0">
+              <a:ln>
+                <a:noFill/>
+              </a:ln>
+              <a:effectLst/>
+              <a:uLnTx/>
+              <a:uFillTx/>
+              <a:ea typeface="Arial Unicode MS" pitchFamily="34" charset="-128"/>
+              <a:cs typeface="Arial Unicode MS" pitchFamily="34" charset="-128"/>
+            </a:endParaRPr>
+          </a:p>
+        </p:txBody>
+      </p:sp>
+      <p:cxnSp>
+        <p:nvCxnSpPr>
+          <p:cNvPr id="42" name="Straight Connector 41">
+            <a:extLst>
+              <a:ext uri="{FF2B5EF4-FFF2-40B4-BE49-F238E27FC236}">
+                <a16:creationId xmlns:a16="http://schemas.microsoft.com/office/drawing/2014/main" id="{0D4EDAE1-E022-4D47-BFE8-DB8E8A0CC4AB}"/>
+              </a:ext>
+            </a:extLst>
+          </p:cNvPr>
+          <p:cNvCxnSpPr>
+            <a:cxnSpLocks/>
+          </p:cNvCxnSpPr>
+          <p:nvPr/>
+        </p:nvCxnSpPr>
+        <p:spPr>
+          <a:xfrm>
+            <a:off x="3535138" y="4575544"/>
+            <a:ext cx="0" cy="485550"/>
+          </a:xfrm>
+          <a:prstGeom prst="line">
+            <a:avLst/>
+          </a:prstGeom>
+          <a:ln w="76200">
+            <a:solidFill>
+              <a:schemeClr val="bg2"/>
+            </a:solidFill>
+            <a:headEnd type="none" w="med" len="med"/>
+            <a:tailEnd type="none" w="med" len="med"/>
+          </a:ln>
+        </p:spPr>
+        <p:style>
+          <a:lnRef idx="1">
+            <a:schemeClr val="accent1"/>
+          </a:lnRef>
+          <a:fillRef idx="0">
+            <a:schemeClr val="accent1"/>
+          </a:fillRef>
+          <a:effectRef idx="0">
+            <a:schemeClr val="accent1"/>
+          </a:effectRef>
+          <a:fontRef idx="minor">
+            <a:schemeClr val="tx1"/>
+          </a:fontRef>
+        </p:style>
+      </p:cxnSp>
+      <p:sp>
+        <p:nvSpPr>
+          <p:cNvPr id="43" name="Rectangle: Rounded Corners 42">
+            <a:extLst>
+              <a:ext uri="{FF2B5EF4-FFF2-40B4-BE49-F238E27FC236}">
+                <a16:creationId xmlns:a16="http://schemas.microsoft.com/office/drawing/2014/main" id="{2523410D-48C4-4016-92C7-EAD431ADB7B2}"/>
+              </a:ext>
+            </a:extLst>
+          </p:cNvPr>
+          <p:cNvSpPr/>
+          <p:nvPr/>
+        </p:nvSpPr>
+        <p:spPr bwMode="gray">
+          <a:xfrm>
+            <a:off x="1424394" y="5061094"/>
+            <a:ext cx="4221488" cy="723014"/>
+          </a:xfrm>
+          <a:prstGeom prst="roundRect">
+            <a:avLst/>
+          </a:prstGeom>
+          <a:solidFill>
+            <a:schemeClr val="bg2">
+              <a:lumMod val="20000"/>
+              <a:lumOff val="80000"/>
+            </a:schemeClr>
+          </a:solidFill>
+          <a:ln>
+            <a:headEnd/>
+            <a:tailEnd/>
+          </a:ln>
+        </p:spPr>
+        <p:style>
+          <a:lnRef idx="2">
+            <a:schemeClr val="accent2"/>
+          </a:lnRef>
+          <a:fillRef idx="1">
+            <a:schemeClr val="lt1"/>
+          </a:fillRef>
+          <a:effectRef idx="0">
+            <a:schemeClr val="accent2"/>
+          </a:effectRef>
+          <a:fontRef idx="minor">
+            <a:schemeClr val="dk1"/>
+          </a:fontRef>
+        </p:style>
+        <p:txBody>
+          <a:bodyPr lIns="90000" tIns="72000" rIns="90000" bIns="72000" rtlCol="0" anchor="ctr"/>
+          <a:lstStyle/>
+          <a:p>
+            <a:pPr marR="0" algn="ctr" defTabSz="914400" eaLnBrk="1" fontAlgn="base" latinLnBrk="0" hangingPunct="1">
+              <a:lnSpc>
+                <a:spcPct val="100000"/>
+              </a:lnSpc>
+              <a:spcBef>
+                <a:spcPct val="50000"/>
+              </a:spcBef>
+              <a:spcAft>
+                <a:spcPct val="0"/>
+              </a:spcAft>
+              <a:buClr>
+                <a:srgbClr val="F0AB00"/>
+              </a:buClr>
+              <a:buSzPct val="80000"/>
+              <a:tabLst/>
+            </a:pPr>
+            <a:r>
+              <a:rPr kumimoji="0" lang="en-US" sz="2000" b="1" i="0" u="none" strike="noStrike" kern="0" cap="none" spc="0" normalizeH="0" baseline="0" noProof="0" dirty="0">
+                <a:ln>
+                  <a:noFill/>
+                </a:ln>
+                <a:effectLst/>
+                <a:uLnTx/>
+                <a:uFillTx/>
+                <a:ea typeface="Arial Unicode MS" pitchFamily="34" charset="-128"/>
+                <a:cs typeface="Arial Unicode MS" pitchFamily="34" charset="-128"/>
+              </a:rPr>
+              <a:t>Linux Kernel</a:t>
+            </a:r>
+            <a:endParaRPr kumimoji="0" lang="en-US" sz="1800" b="1" i="0" u="none" strike="noStrike" kern="0" cap="none" spc="0" normalizeH="0" baseline="0" noProof="0" dirty="0">
+              <a:ln>
+                <a:noFill/>
+              </a:ln>
+              <a:effectLst/>
+              <a:uLnTx/>
+              <a:uFillTx/>
+              <a:ea typeface="Arial Unicode MS" pitchFamily="34" charset="-128"/>
+              <a:cs typeface="Arial Unicode MS" pitchFamily="34" charset="-128"/>
+            </a:endParaRPr>
+          </a:p>
+        </p:txBody>
+      </p:sp>
+      <p:sp>
+        <p:nvSpPr>
+          <p:cNvPr id="51" name="Rectangle: Rounded Corners 50">
+            <a:extLst>
+              <a:ext uri="{FF2B5EF4-FFF2-40B4-BE49-F238E27FC236}">
+                <a16:creationId xmlns:a16="http://schemas.microsoft.com/office/drawing/2014/main" id="{7DE3B177-A7B0-4867-B54E-B383E5D84DF0}"/>
+              </a:ext>
+            </a:extLst>
+          </p:cNvPr>
+          <p:cNvSpPr/>
+          <p:nvPr/>
+        </p:nvSpPr>
+        <p:spPr bwMode="gray">
+          <a:xfrm>
+            <a:off x="2596211" y="1541716"/>
+            <a:ext cx="1877854" cy="686695"/>
+          </a:xfrm>
+          <a:prstGeom prst="roundRect">
+            <a:avLst/>
+          </a:prstGeom>
+          <a:ln>
+            <a:headEnd/>
+            <a:tailEnd/>
+          </a:ln>
+        </p:spPr>
+        <p:style>
+          <a:lnRef idx="2">
+            <a:schemeClr val="accent6"/>
+          </a:lnRef>
+          <a:fillRef idx="1">
+            <a:schemeClr val="lt1"/>
+          </a:fillRef>
+          <a:effectRef idx="0">
+            <a:schemeClr val="accent6"/>
+          </a:effectRef>
+          <a:fontRef idx="minor">
+            <a:schemeClr val="dk1"/>
+          </a:fontRef>
+        </p:style>
+        <p:txBody>
+          <a:bodyPr rot="0" spcFirstLastPara="0" vertOverflow="overflow" horzOverflow="overflow" vert="horz" wrap="square" lIns="90000" tIns="72000" rIns="90000" bIns="72000" numCol="1" spcCol="0" rtlCol="0" fromWordArt="0" anchor="ctr" anchorCtr="0" forceAA="0" compatLnSpc="1">
+            <a:prstTxWarp prst="textNoShape">
+              <a:avLst/>
+            </a:prstTxWarp>
+            <a:noAutofit/>
+          </a:bodyPr>
+          <a:lstStyle/>
+          <a:p>
+            <a:pPr algn="ctr" defTabSz="914400" fontAlgn="base">
+              <a:spcBef>
+                <a:spcPct val="50000"/>
+              </a:spcBef>
+              <a:spcAft>
+                <a:spcPct val="0"/>
+              </a:spcAft>
+              <a:buClr>
+                <a:srgbClr val="F0AB00"/>
+              </a:buClr>
+              <a:buSzPct val="80000"/>
+            </a:pPr>
+            <a:r>
+              <a:rPr lang="en-US" sz="1800" kern="0" dirty="0">
+                <a:solidFill>
+                  <a:schemeClr val="dk1"/>
+                </a:solidFill>
+                <a:latin typeface="+mn-lt"/>
+                <a:ea typeface="Arial Unicode MS" pitchFamily="34" charset="-128"/>
+              </a:rPr>
+              <a:t>API Server</a:t>
+            </a:r>
+          </a:p>
+        </p:txBody>
+      </p:sp>
+      <p:sp>
+        <p:nvSpPr>
+          <p:cNvPr id="50" name="Title 49">
+            <a:extLst>
+              <a:ext uri="{FF2B5EF4-FFF2-40B4-BE49-F238E27FC236}">
+                <a16:creationId xmlns:a16="http://schemas.microsoft.com/office/drawing/2014/main" id="{7D480E47-3DD1-4ACF-8C6E-41D6F9D75F58}"/>
+              </a:ext>
+            </a:extLst>
+          </p:cNvPr>
+          <p:cNvSpPr>
+            <a:spLocks noGrp="1"/>
+          </p:cNvSpPr>
+          <p:nvPr>
+            <p:ph type="title"/>
+          </p:nvPr>
+        </p:nvSpPr>
+        <p:spPr/>
+        <p:txBody>
+          <a:bodyPr/>
+          <a:lstStyle/>
+          <a:p>
+            <a:r>
+              <a:rPr lang="en-US" dirty="0"/>
               <a:t>How to prevent this?</a:t>
             </a:r>
           </a:p>
@@ -26628,7 +26857,7 @@
 </p:sld>
 </file>
 
-<file path=ppt/slides/slide21.xml><?xml version="1.0" encoding="utf-8"?>
+<file path=ppt/slides/slide22.xml><?xml version="1.0" encoding="utf-8"?>
 <p:sld xmlns:a="http://schemas.openxmlformats.org/drawingml/2006/main" xmlns:r="http://schemas.openxmlformats.org/officeDocument/2006/relationships" xmlns:p="http://schemas.openxmlformats.org/presentationml/2006/main">
   <p:cSld>
     <p:spTree>
@@ -28165,7 +28394,7 @@
 </p:sld>
 </file>
 
-<file path=ppt/slides/slide22.xml><?xml version="1.0" encoding="utf-8"?>
+<file path=ppt/slides/slide23.xml><?xml version="1.0" encoding="utf-8"?>
 <p:sld xmlns:a="http://schemas.openxmlformats.org/drawingml/2006/main" xmlns:r="http://schemas.openxmlformats.org/officeDocument/2006/relationships" xmlns:p="http://schemas.openxmlformats.org/presentationml/2006/main">
   <p:cSld>
     <p:spTree>
@@ -29019,7 +29248,7 @@
 </p:sld>
 </file>
 
-<file path=ppt/slides/slide23.xml><?xml version="1.0" encoding="utf-8"?>
+<file path=ppt/slides/slide24.xml><?xml version="1.0" encoding="utf-8"?>
 <p:sld xmlns:a="http://schemas.openxmlformats.org/drawingml/2006/main" xmlns:r="http://schemas.openxmlformats.org/officeDocument/2006/relationships" xmlns:p="http://schemas.openxmlformats.org/presentationml/2006/main">
   <p:cSld>
     <p:spTree>
@@ -29992,7 +30221,7 @@
 </p:sld>
 </file>
 
-<file path=ppt/slides/slide24.xml><?xml version="1.0" encoding="utf-8"?>
+<file path=ppt/slides/slide25.xml><?xml version="1.0" encoding="utf-8"?>
 <p:sld xmlns:a="http://schemas.openxmlformats.org/drawingml/2006/main" xmlns:r="http://schemas.openxmlformats.org/officeDocument/2006/relationships" xmlns:p="http://schemas.openxmlformats.org/presentationml/2006/main">
   <p:cSld>
     <p:spTree>
@@ -30071,450 +30300,6 @@
     <p:extLst>
       <p:ext uri="{BB962C8B-B14F-4D97-AF65-F5344CB8AC3E}">
         <p14:creationId xmlns:p14="http://schemas.microsoft.com/office/powerpoint/2010/main" val="110246728"/>
-      </p:ext>
-    </p:extLst>
-  </p:cSld>
-  <p:clrMapOvr>
-    <a:masterClrMapping/>
-  </p:clrMapOvr>
-</p:sld>
-</file>
-
-<file path=ppt/slides/slide25.xml><?xml version="1.0" encoding="utf-8"?>
-<p:sld xmlns:a="http://schemas.openxmlformats.org/drawingml/2006/main" xmlns:r="http://schemas.openxmlformats.org/officeDocument/2006/relationships" xmlns:p="http://schemas.openxmlformats.org/presentationml/2006/main">
-  <p:cSld>
-    <p:spTree>
-      <p:nvGrpSpPr>
-        <p:cNvPr id="1" name=""/>
-        <p:cNvGrpSpPr/>
-        <p:nvPr/>
-      </p:nvGrpSpPr>
-      <p:grpSpPr>
-        <a:xfrm>
-          <a:off x="0" y="0"/>
-          <a:ext cx="0" cy="0"/>
-          <a:chOff x="0" y="0"/>
-          <a:chExt cx="0" cy="0"/>
-        </a:xfrm>
-      </p:grpSpPr>
-      <p:sp>
-        <p:nvSpPr>
-          <p:cNvPr id="3" name="Title 2">
-            <a:extLst>
-              <a:ext uri="{FF2B5EF4-FFF2-40B4-BE49-F238E27FC236}">
-                <a16:creationId xmlns:a16="http://schemas.microsoft.com/office/drawing/2014/main" id="{26810A03-F19B-46EA-B8EE-B5184F6E9CF6}"/>
-              </a:ext>
-            </a:extLst>
-          </p:cNvPr>
-          <p:cNvSpPr>
-            <a:spLocks noGrp="1"/>
-          </p:cNvSpPr>
-          <p:nvPr>
-            <p:ph type="title"/>
-          </p:nvPr>
-        </p:nvSpPr>
-        <p:spPr/>
-        <p:txBody>
-          <a:bodyPr/>
-          <a:lstStyle/>
-          <a:p>
-            <a:r>
-              <a:rPr lang="en-US" dirty="0"/>
-              <a:t>                 </a:t>
-            </a:r>
-            <a:r>
-              <a:rPr lang="en-US" dirty="0" err="1"/>
-              <a:t>Karydia</a:t>
-            </a:r>
-            <a:r>
-              <a:rPr lang="en-US" dirty="0"/>
-              <a:t> – secure by default</a:t>
-            </a:r>
-          </a:p>
-        </p:txBody>
-      </p:sp>
-      <p:sp>
-        <p:nvSpPr>
-          <p:cNvPr id="4" name="Rectangle 3">
-            <a:extLst>
-              <a:ext uri="{FF2B5EF4-FFF2-40B4-BE49-F238E27FC236}">
-                <a16:creationId xmlns:a16="http://schemas.microsoft.com/office/drawing/2014/main" id="{DC4FA8AC-9DA5-4325-83DB-FAC4C89FF981}"/>
-              </a:ext>
-            </a:extLst>
-          </p:cNvPr>
-          <p:cNvSpPr/>
-          <p:nvPr/>
-        </p:nvSpPr>
-        <p:spPr>
-          <a:xfrm>
-            <a:off x="3711810" y="5027541"/>
-            <a:ext cx="4770857" cy="461665"/>
-          </a:xfrm>
-          <a:prstGeom prst="rect">
-            <a:avLst/>
-          </a:prstGeom>
-        </p:spPr>
-        <p:txBody>
-          <a:bodyPr wrap="none">
-            <a:spAutoFit/>
-          </a:bodyPr>
-          <a:lstStyle/>
-          <a:p>
-            <a:pPr algn="ctr"/>
-            <a:r>
-              <a:rPr lang="de-DE" sz="2400" dirty="0">
-                <a:hlinkClick r:id="rId2"/>
-              </a:rPr>
-              <a:t>https://github.com/karydia/karydia</a:t>
-            </a:r>
-            <a:endParaRPr lang="en-US" sz="2400" dirty="0"/>
-          </a:p>
-        </p:txBody>
-      </p:sp>
-      <p:sp>
-        <p:nvSpPr>
-          <p:cNvPr id="5" name="Quote placeholder">
-            <a:extLst>
-              <a:ext uri="{FF2B5EF4-FFF2-40B4-BE49-F238E27FC236}">
-                <a16:creationId xmlns:a16="http://schemas.microsoft.com/office/drawing/2014/main" id="{2165E1B0-3388-4652-9BEA-77FBD1B1A67E}"/>
-              </a:ext>
-            </a:extLst>
-          </p:cNvPr>
-          <p:cNvSpPr txBox="1">
-            <a:spLocks/>
-          </p:cNvSpPr>
-          <p:nvPr/>
-        </p:nvSpPr>
-        <p:spPr bwMode="gray">
-          <a:xfrm>
-            <a:off x="802383" y="2016714"/>
-            <a:ext cx="4972775" cy="2132903"/>
-          </a:xfrm>
-          <a:prstGeom prst="rect">
-            <a:avLst/>
-          </a:prstGeom>
-        </p:spPr>
-        <p:txBody>
-          <a:bodyPr/>
-          <a:lstStyle>
-            <a:lvl1pPr marL="0" indent="0" algn="l" defTabSz="1088558" rtl="0" eaLnBrk="1" latinLnBrk="0" hangingPunct="1">
-              <a:spcBef>
-                <a:spcPts val="1800"/>
-              </a:spcBef>
-              <a:buClr>
-                <a:schemeClr val="accent1"/>
-              </a:buClr>
-              <a:buSzPct val="80000"/>
-              <a:buFontTx/>
-              <a:buNone/>
-              <a:defRPr sz="2000" b="0" kern="1200">
-                <a:solidFill>
-                  <a:schemeClr val="tx1"/>
-                </a:solidFill>
-                <a:latin typeface="+mn-lt"/>
-                <a:ea typeface="+mn-ea"/>
-                <a:cs typeface="+mn-cs"/>
-              </a:defRPr>
-            </a:lvl1pPr>
-            <a:lvl2pPr marL="179964" indent="-179964" algn="l" defTabSz="1088558" rtl="0" eaLnBrk="1" latinLnBrk="0" hangingPunct="1">
-              <a:spcBef>
-                <a:spcPts val="600"/>
-              </a:spcBef>
-              <a:buClr>
-                <a:schemeClr val="accent1"/>
-              </a:buClr>
-              <a:buSzPct val="100000"/>
-              <a:buFont typeface="Wingdings" pitchFamily="2" charset="2"/>
-              <a:buChar char="§"/>
-              <a:defRPr sz="1800" kern="1200">
-                <a:solidFill>
-                  <a:schemeClr val="tx1"/>
-                </a:solidFill>
-                <a:latin typeface="+mn-lt"/>
-                <a:ea typeface="+mn-ea"/>
-                <a:cs typeface="+mn-cs"/>
-              </a:defRPr>
-            </a:lvl2pPr>
-            <a:lvl3pPr marL="358775" indent="-179388" algn="l" defTabSz="1088558" rtl="0" eaLnBrk="1" latinLnBrk="0" hangingPunct="1">
-              <a:spcBef>
-                <a:spcPts val="300"/>
-              </a:spcBef>
-              <a:buClr>
-                <a:schemeClr val="tx1"/>
-              </a:buClr>
-              <a:buSzPct val="100000"/>
-              <a:buFont typeface="Arial" panose="020B0604020202020204" pitchFamily="34" charset="0"/>
-              <a:buChar char="–"/>
-              <a:defRPr lang="en-US" sz="1800" kern="1200" noProof="0" dirty="0" smtClean="0">
-                <a:solidFill>
-                  <a:schemeClr val="tx1"/>
-                </a:solidFill>
-                <a:latin typeface="+mn-lt"/>
-                <a:ea typeface="+mn-ea"/>
-                <a:cs typeface="+mn-cs"/>
-              </a:defRPr>
-            </a:lvl3pPr>
-            <a:lvl4pPr marL="539892" indent="-179964" algn="l" defTabSz="1088558" rtl="0" eaLnBrk="1" latinLnBrk="0" hangingPunct="1">
-              <a:spcBef>
-                <a:spcPts val="300"/>
-              </a:spcBef>
-              <a:buClr>
-                <a:schemeClr val="tx1"/>
-              </a:buClr>
-              <a:buSzPct val="120000"/>
-              <a:buFont typeface="Arial" pitchFamily="34" charset="0"/>
-              <a:buChar char="▫"/>
-              <a:defRPr sz="1600" kern="1200">
-                <a:solidFill>
-                  <a:schemeClr val="tx1"/>
-                </a:solidFill>
-                <a:latin typeface="+mn-lt"/>
-                <a:ea typeface="+mn-ea"/>
-                <a:cs typeface="+mn-cs"/>
-              </a:defRPr>
-            </a:lvl4pPr>
-            <a:lvl5pPr marL="719856" indent="-179964" algn="l" defTabSz="1088558" rtl="0" eaLnBrk="1" latinLnBrk="0" hangingPunct="1">
-              <a:spcBef>
-                <a:spcPts val="100"/>
-              </a:spcBef>
-              <a:buClr>
-                <a:schemeClr val="tx1"/>
-              </a:buClr>
-              <a:buSzPct val="100000"/>
-              <a:buFont typeface="Symbol" panose="05050102010706020507" pitchFamily="18" charset="2"/>
-              <a:buChar char="-"/>
-              <a:defRPr sz="1400" kern="1200" baseline="0">
-                <a:solidFill>
-                  <a:schemeClr val="tx1"/>
-                </a:solidFill>
-                <a:latin typeface="+mn-lt"/>
-                <a:ea typeface="+mn-ea"/>
-                <a:cs typeface="+mn-cs"/>
-              </a:defRPr>
-            </a:lvl5pPr>
-            <a:lvl6pPr marL="2993535" indent="-272140" algn="l" defTabSz="1088558" rtl="0" eaLnBrk="1" latinLnBrk="0" hangingPunct="1">
-              <a:spcBef>
-                <a:spcPct val="20000"/>
-              </a:spcBef>
-              <a:buFont typeface="Arial" pitchFamily="34" charset="0"/>
-              <a:buChar char="•"/>
-              <a:defRPr sz="2400" kern="1200">
-                <a:solidFill>
-                  <a:schemeClr val="tx1"/>
-                </a:solidFill>
-                <a:latin typeface="+mn-lt"/>
-                <a:ea typeface="+mn-ea"/>
-                <a:cs typeface="+mn-cs"/>
-              </a:defRPr>
-            </a:lvl6pPr>
-            <a:lvl7pPr marL="3537814" indent="-272140" algn="l" defTabSz="1088558" rtl="0" eaLnBrk="1" latinLnBrk="0" hangingPunct="1">
-              <a:spcBef>
-                <a:spcPct val="20000"/>
-              </a:spcBef>
-              <a:buFont typeface="Arial" pitchFamily="34" charset="0"/>
-              <a:buChar char="•"/>
-              <a:defRPr sz="2400" kern="1200">
-                <a:solidFill>
-                  <a:schemeClr val="tx1"/>
-                </a:solidFill>
-                <a:latin typeface="+mn-lt"/>
-                <a:ea typeface="+mn-ea"/>
-                <a:cs typeface="+mn-cs"/>
-              </a:defRPr>
-            </a:lvl7pPr>
-            <a:lvl8pPr marL="4082093" indent="-272140" algn="l" defTabSz="1088558" rtl="0" eaLnBrk="1" latinLnBrk="0" hangingPunct="1">
-              <a:spcBef>
-                <a:spcPct val="20000"/>
-              </a:spcBef>
-              <a:buFont typeface="Arial" pitchFamily="34" charset="0"/>
-              <a:buChar char="•"/>
-              <a:defRPr sz="2400" kern="1200">
-                <a:solidFill>
-                  <a:schemeClr val="tx1"/>
-                </a:solidFill>
-                <a:latin typeface="+mn-lt"/>
-                <a:ea typeface="+mn-ea"/>
-                <a:cs typeface="+mn-cs"/>
-              </a:defRPr>
-            </a:lvl8pPr>
-            <a:lvl9pPr marL="4626373" indent="-272140" algn="l" defTabSz="1088558" rtl="0" eaLnBrk="1" latinLnBrk="0" hangingPunct="1">
-              <a:spcBef>
-                <a:spcPct val="20000"/>
-              </a:spcBef>
-              <a:buFont typeface="Arial" pitchFamily="34" charset="0"/>
-              <a:buChar char="•"/>
-              <a:defRPr sz="2400" kern="1200">
-                <a:solidFill>
-                  <a:schemeClr val="tx1"/>
-                </a:solidFill>
-                <a:latin typeface="+mn-lt"/>
-                <a:ea typeface="+mn-ea"/>
-                <a:cs typeface="+mn-cs"/>
-              </a:defRPr>
-            </a:lvl9pPr>
-          </a:lstStyle>
-          <a:p>
-            <a:r>
-              <a:rPr lang="en-US" sz="2400" dirty="0"/>
-              <a:t>Unmount</a:t>
-            </a:r>
-            <a:r>
-              <a:rPr lang="en-US" sz="2400" dirty="0">
-                <a:solidFill>
-                  <a:schemeClr val="accent1"/>
-                </a:solidFill>
-              </a:rPr>
-              <a:t> service account token!</a:t>
-            </a:r>
-          </a:p>
-          <a:p>
-            <a:r>
-              <a:rPr lang="en-US" sz="2400" dirty="0"/>
-              <a:t>Restrict </a:t>
-            </a:r>
-            <a:r>
-              <a:rPr lang="en-US" sz="2400" dirty="0">
-                <a:solidFill>
-                  <a:schemeClr val="accent1"/>
-                </a:solidFill>
-              </a:rPr>
-              <a:t>network communication!</a:t>
-            </a:r>
-            <a:endParaRPr lang="en-US" sz="2400" dirty="0"/>
-          </a:p>
-          <a:p>
-            <a:r>
-              <a:rPr lang="en-US" sz="2400" dirty="0"/>
-              <a:t>Restrict </a:t>
-            </a:r>
-            <a:r>
-              <a:rPr lang="en-US" sz="2400" dirty="0">
-                <a:solidFill>
-                  <a:schemeClr val="accent1"/>
-                </a:solidFill>
-              </a:rPr>
-              <a:t>system calls!</a:t>
-            </a:r>
-            <a:endParaRPr lang="en-US" sz="2400" dirty="0"/>
-          </a:p>
-          <a:p>
-            <a:r>
-              <a:rPr lang="en-US" sz="2400" dirty="0"/>
-              <a:t>Run with </a:t>
-            </a:r>
-            <a:r>
-              <a:rPr lang="en-US" sz="2400" dirty="0">
-                <a:solidFill>
-                  <a:schemeClr val="accent1"/>
-                </a:solidFill>
-              </a:rPr>
-              <a:t>minimal privileges!</a:t>
-            </a:r>
-            <a:endParaRPr lang="en-US" sz="2400" dirty="0"/>
-          </a:p>
-          <a:p>
-            <a:endParaRPr lang="en-US" sz="2400" dirty="0"/>
-          </a:p>
-        </p:txBody>
-      </p:sp>
-      <p:pic>
-        <p:nvPicPr>
-          <p:cNvPr id="6" name="Picture 2">
-            <a:extLst>
-              <a:ext uri="{FF2B5EF4-FFF2-40B4-BE49-F238E27FC236}">
-                <a16:creationId xmlns:a16="http://schemas.microsoft.com/office/drawing/2014/main" id="{625A63B7-B7C6-4DF9-B0BF-873E9C28E3D2}"/>
-              </a:ext>
-            </a:extLst>
-          </p:cNvPr>
-          <p:cNvPicPr>
-            <a:picLocks noChangeAspect="1" noChangeArrowheads="1"/>
-          </p:cNvPicPr>
-          <p:nvPr/>
-        </p:nvPicPr>
-        <p:blipFill>
-          <a:blip r:embed="rId3">
-            <a:extLst>
-              <a:ext uri="{28A0092B-C50C-407E-A947-70E740481C1C}">
-                <a14:useLocalDpi xmlns:a14="http://schemas.microsoft.com/office/drawing/2010/main" val="0"/>
-              </a:ext>
-            </a:extLst>
-          </a:blip>
-          <a:srcRect/>
-          <a:stretch>
-            <a:fillRect/>
-          </a:stretch>
-        </p:blipFill>
-        <p:spPr bwMode="auto">
-          <a:xfrm>
-            <a:off x="504000" y="62377"/>
-            <a:ext cx="1252577" cy="1252577"/>
-          </a:xfrm>
-          <a:prstGeom prst="rect">
-            <a:avLst/>
-          </a:prstGeom>
-          <a:noFill/>
-          <a:extLst>
-            <a:ext uri="{909E8E84-426E-40DD-AFC4-6F175D3DCCD1}">
-              <a14:hiddenFill xmlns:a14="http://schemas.microsoft.com/office/drawing/2010/main">
-                <a:solidFill>
-                  <a:srgbClr val="FFFFFF"/>
-                </a:solidFill>
-              </a14:hiddenFill>
-            </a:ext>
-          </a:extLst>
-        </p:spPr>
-      </p:pic>
-      <p:pic>
-        <p:nvPicPr>
-          <p:cNvPr id="1026" name="Picture 2" descr="karydia-architecture.png">
-            <a:extLst>
-              <a:ext uri="{FF2B5EF4-FFF2-40B4-BE49-F238E27FC236}">
-                <a16:creationId xmlns:a16="http://schemas.microsoft.com/office/drawing/2014/main" id="{26B5DD7E-8FFC-4B60-AC55-0CEF5AFF3455}"/>
-              </a:ext>
-            </a:extLst>
-          </p:cNvPr>
-          <p:cNvPicPr>
-            <a:picLocks noChangeAspect="1" noChangeArrowheads="1"/>
-          </p:cNvPicPr>
-          <p:nvPr/>
-        </p:nvPicPr>
-        <p:blipFill>
-          <a:blip r:embed="rId4">
-            <a:extLst>
-              <a:ext uri="{28A0092B-C50C-407E-A947-70E740481C1C}">
-                <a14:useLocalDpi xmlns:a14="http://schemas.microsoft.com/office/drawing/2010/main" val="0"/>
-              </a:ext>
-            </a:extLst>
-          </a:blip>
-          <a:srcRect/>
-          <a:stretch>
-            <a:fillRect/>
-          </a:stretch>
-        </p:blipFill>
-        <p:spPr bwMode="auto">
-          <a:xfrm>
-            <a:off x="6192822" y="2016714"/>
-            <a:ext cx="4381500" cy="2533650"/>
-          </a:xfrm>
-          <a:prstGeom prst="rect">
-            <a:avLst/>
-          </a:prstGeom>
-          <a:noFill/>
-          <a:extLst>
-            <a:ext uri="{909E8E84-426E-40DD-AFC4-6F175D3DCCD1}">
-              <a14:hiddenFill xmlns:a14="http://schemas.microsoft.com/office/drawing/2010/main">
-                <a:solidFill>
-                  <a:srgbClr val="FFFFFF"/>
-                </a:solidFill>
-              </a14:hiddenFill>
-            </a:ext>
-          </a:extLst>
-        </p:spPr>
-      </p:pic>
-    </p:spTree>
-    <p:extLst>
-      <p:ext uri="{BB962C8B-B14F-4D97-AF65-F5344CB8AC3E}">
-        <p14:creationId xmlns:p14="http://schemas.microsoft.com/office/powerpoint/2010/main" val="465225605"/>
       </p:ext>
     </p:extLst>
   </p:cSld>
@@ -33545,47 +33330,6 @@
           </a:p>
         </p:txBody>
       </p:sp>
-      <p:sp>
-        <p:nvSpPr>
-          <p:cNvPr id="4" name="Rectangle 3">
-            <a:extLst>
-              <a:ext uri="{FF2B5EF4-FFF2-40B4-BE49-F238E27FC236}">
-                <a16:creationId xmlns:a16="http://schemas.microsoft.com/office/drawing/2014/main" id="{7C9D8882-D8EE-4FA1-B0BD-FD6CC007D287}"/>
-              </a:ext>
-            </a:extLst>
-          </p:cNvPr>
-          <p:cNvSpPr/>
-          <p:nvPr/>
-        </p:nvSpPr>
-        <p:spPr>
-          <a:xfrm>
-            <a:off x="320159" y="5863579"/>
-            <a:ext cx="5843636" cy="369332"/>
-          </a:xfrm>
-          <a:prstGeom prst="rect">
-            <a:avLst/>
-          </a:prstGeom>
-        </p:spPr>
-        <p:txBody>
-          <a:bodyPr wrap="square">
-            <a:spAutoFit/>
-          </a:bodyPr>
-          <a:lstStyle/>
-          <a:p>
-            <a:pPr algn="ctr"/>
-            <a:r>
-              <a:rPr lang="en-US" sz="1800" dirty="0">
-                <a:hlinkClick r:id="rId3"/>
-              </a:rPr>
-              <a:t>https://github.com/kubernetes/kubernetes/issues/43783</a:t>
-            </a:r>
-            <a:r>
-              <a:rPr lang="en-US" sz="1800" dirty="0"/>
-              <a:t> </a:t>
-            </a:r>
-          </a:p>
-        </p:txBody>
-      </p:sp>
       <p:pic>
         <p:nvPicPr>
           <p:cNvPr id="6" name="Picture 5">
@@ -33601,7 +33345,7 @@
           <p:nvPr/>
         </p:nvPicPr>
         <p:blipFill>
-          <a:blip r:embed="rId4"/>
+          <a:blip r:embed="rId3"/>
           <a:stretch>
             <a:fillRect/>
           </a:stretch>
@@ -33808,6 +33552,48 @@
               <a:ea typeface="Arial Unicode MS" pitchFamily="34" charset="-128"/>
               <a:cs typeface="Arial Unicode MS" pitchFamily="34" charset="-128"/>
             </a:endParaRPr>
+          </a:p>
+        </p:txBody>
+      </p:sp>
+      <p:sp>
+        <p:nvSpPr>
+          <p:cNvPr id="9" name="Textfeld 8">
+            <a:extLst>
+              <a:ext uri="{FF2B5EF4-FFF2-40B4-BE49-F238E27FC236}">
+                <a16:creationId xmlns:a16="http://schemas.microsoft.com/office/drawing/2014/main" id="{2554B025-4A36-F94D-87F9-AA05D8FF4FF9}"/>
+              </a:ext>
+            </a:extLst>
+          </p:cNvPr>
+          <p:cNvSpPr txBox="1"/>
+          <p:nvPr/>
+        </p:nvSpPr>
+        <p:spPr>
+          <a:xfrm>
+            <a:off x="198833" y="5593972"/>
+            <a:ext cx="6096000" cy="369332"/>
+          </a:xfrm>
+          <a:prstGeom prst="rect">
+            <a:avLst/>
+          </a:prstGeom>
+          <a:noFill/>
+        </p:spPr>
+        <p:txBody>
+          <a:bodyPr wrap="square">
+            <a:spAutoFit/>
+          </a:bodyPr>
+          <a:lstStyle/>
+          <a:p>
+            <a:pPr algn="ctr"/>
+            <a:r>
+              <a:rPr lang="de-DE" sz="1800" dirty="0">
+                <a:hlinkClick r:id="rId4"/>
+              </a:rPr>
+              <a:t>https://kubernetes.io/docs/concepts/policy/pid-limiting/</a:t>
+            </a:r>
+            <a:r>
+              <a:rPr lang="de-DE" sz="1800" dirty="0"/>
+              <a:t> </a:t>
+            </a:r>
           </a:p>
         </p:txBody>
       </p:sp>
